--- a/Presentacion Clustering Futbol Europeo.pptx
+++ b/Presentacion Clustering Futbol Europeo.pptx
@@ -5,7 +5,7 @@
     <p:sldMasterId id="2147483648" r:id="rId1"/>
   </p:sldMasterIdLst>
   <p:notesMasterIdLst>
-    <p:notesMasterId r:id="rId13"/>
+    <p:notesMasterId r:id="rId14"/>
   </p:notesMasterIdLst>
   <p:sldIdLst>
     <p:sldId id="256" r:id="rId2"/>
@@ -18,7 +18,8 @@
     <p:sldId id="262" r:id="rId9"/>
     <p:sldId id="263" r:id="rId10"/>
     <p:sldId id="264" r:id="rId11"/>
-    <p:sldId id="265" r:id="rId12"/>
+    <p:sldId id="267" r:id="rId12"/>
+    <p:sldId id="265" r:id="rId13"/>
   </p:sldIdLst>
   <p:sldSz cx="9144000" cy="5143500" type="screen16x9"/>
   <p:notesSz cx="5143500" cy="9144000"/>
@@ -481,6 +482,90 @@
             <a:fld id="{F7021451-1387-4CA6-816F-3879F97B5CBC}" type="slidenum">
               <a:rPr lang="en-US"/>
               <a:t>11</a:t>
+            </a:fld>
+            <a:endParaRPr lang="en-US"/>
+          </a:p>
+        </p:txBody>
+      </p:sp>
+    </p:spTree>
+    <p:extLst>
+      <p:ext uri="{BB962C8B-B14F-4D97-AF65-F5344CB8AC3E}">
+        <p14:creationId xmlns:p14="http://schemas.microsoft.com/office/powerpoint/2010/main" val="3244501628"/>
+      </p:ext>
+    </p:extLst>
+  </p:cSld>
+  <p:clrMapOvr>
+    <a:masterClrMapping/>
+  </p:clrMapOvr>
+</p:notes>
+</file>
+
+<file path=ppt/notesSlides/notesSlide12.xml><?xml version="1.0" encoding="utf-8"?>
+<p:notes xmlns:a="http://schemas.openxmlformats.org/drawingml/2006/main" xmlns:r="http://schemas.openxmlformats.org/officeDocument/2006/relationships" xmlns:p="http://schemas.openxmlformats.org/presentationml/2006/main">
+  <p:cSld>
+    <p:spTree>
+      <p:nvGrpSpPr>
+        <p:cNvPr id="1" name=""/>
+        <p:cNvGrpSpPr/>
+        <p:nvPr/>
+      </p:nvGrpSpPr>
+      <p:grpSpPr>
+        <a:xfrm>
+          <a:off x="0" y="0"/>
+          <a:ext cx="0" cy="0"/>
+          <a:chOff x="0" y="0"/>
+          <a:chExt cx="0" cy="0"/>
+        </a:xfrm>
+      </p:grpSpPr>
+      <p:sp>
+        <p:nvSpPr>
+          <p:cNvPr id="2" name="Slide Image Placeholder 1"/>
+          <p:cNvSpPr>
+            <a:spLocks noGrp="1" noRot="1" noChangeAspect="1"/>
+          </p:cNvSpPr>
+          <p:nvPr>
+            <p:ph type="sldImg"/>
+          </p:nvPr>
+        </p:nvSpPr>
+        <p:spPr/>
+      </p:sp>
+      <p:sp>
+        <p:nvSpPr>
+          <p:cNvPr id="3" name="Notes Placeholder 2"/>
+          <p:cNvSpPr>
+            <a:spLocks noGrp="1"/>
+          </p:cNvSpPr>
+          <p:nvPr>
+            <p:ph type="body" idx="1"/>
+          </p:nvPr>
+        </p:nvSpPr>
+        <p:spPr/>
+        <p:txBody>
+          <a:bodyPr/>
+          <a:lstStyle/>
+          <a:p>
+            <a:endParaRPr lang="en-US" dirty="0"/>
+          </a:p>
+        </p:txBody>
+      </p:sp>
+      <p:sp>
+        <p:nvSpPr>
+          <p:cNvPr id="4" name="Slide Number Placeholder 3"/>
+          <p:cNvSpPr>
+            <a:spLocks noGrp="1"/>
+          </p:cNvSpPr>
+          <p:nvPr>
+            <p:ph type="sldNum" sz="quarter" idx="10"/>
+          </p:nvPr>
+        </p:nvSpPr>
+        <p:spPr/>
+        <p:txBody>
+          <a:bodyPr/>
+          <a:lstStyle/>
+          <a:p>
+            <a:fld id="{F7021451-1387-4CA6-816F-3879F97B5CBC}" type="slidenum">
+              <a:rPr lang="en-US"/>
+              <a:t>12</a:t>
             </a:fld>
             <a:endParaRPr lang="en-US"/>
           </a:p>
@@ -2014,7 +2099,7 @@
                 <a:ea typeface="Cambria" pitchFamily="34" charset="-122"/>
                 <a:cs typeface="Cambria" pitchFamily="34" charset="-120"/>
               </a:rPr>
-              <a:t>08  Preguntas con valor de negocio</a:t>
+              <a:t>09  Preguntas con valor de negocio</a:t>
             </a:r>
             <a:endParaRPr lang="en-US" sz="2200" dirty="0"/>
           </a:p>
@@ -2028,8 +2113,8 @@
         </p:nvSpPr>
         <p:spPr>
           <a:xfrm>
-            <a:off x="274320" y="822960"/>
-            <a:ext cx="4206240" cy="1737360"/>
+            <a:off x="787791" y="886968"/>
+            <a:ext cx="7990449" cy="1463040"/>
           </a:xfrm>
           <a:prstGeom prst="rect">
             <a:avLst/>
@@ -2060,8 +2145,8 @@
         </p:nvSpPr>
         <p:spPr>
           <a:xfrm>
-            <a:off x="274320" y="822960"/>
-            <a:ext cx="4206240" cy="347472"/>
+            <a:off x="787790" y="822960"/>
+            <a:ext cx="7990449" cy="585216"/>
           </a:xfrm>
           <a:prstGeom prst="rect">
             <a:avLst/>
@@ -2085,8 +2170,8 @@
         </p:nvSpPr>
         <p:spPr>
           <a:xfrm>
-            <a:off x="274320" y="822960"/>
-            <a:ext cx="292608" cy="1737360"/>
+            <a:off x="492369" y="822960"/>
+            <a:ext cx="292608" cy="1527048"/>
           </a:xfrm>
           <a:prstGeom prst="rect">
             <a:avLst/>
@@ -2101,6 +2186,13 @@
             <a:prstDash val="solid"/>
           </a:ln>
         </p:spPr>
+        <p:txBody>
+          <a:bodyPr/>
+          <a:lstStyle/>
+          <a:p>
+            <a:endParaRPr lang="es-CO" dirty="0"/>
+          </a:p>
+        </p:txBody>
       </p:sp>
       <p:sp>
         <p:nvSpPr>
@@ -2110,7 +2202,7 @@
         </p:nvSpPr>
         <p:spPr>
           <a:xfrm>
-            <a:off x="274320" y="1499616"/>
+            <a:off x="495183" y="1371600"/>
             <a:ext cx="292608" cy="384048"/>
           </a:xfrm>
           <a:prstGeom prst="rect">
@@ -2135,7 +2227,7 @@
                 <a:ea typeface="Cambria" pitchFamily="34" charset="-122"/>
                 <a:cs typeface="Cambria" pitchFamily="34" charset="-120"/>
               </a:rPr>
-              <a:t>Q1</a:t>
+              <a:t>P1</a:t>
             </a:r>
             <a:endParaRPr lang="en-US" sz="1300" dirty="0"/>
           </a:p>
@@ -2149,8 +2241,8 @@
         </p:nvSpPr>
         <p:spPr>
           <a:xfrm>
-            <a:off x="658368" y="859536"/>
-            <a:ext cx="3749040" cy="274320"/>
+            <a:off x="787791" y="804672"/>
+            <a:ext cx="7990449" cy="598932"/>
           </a:xfrm>
           <a:prstGeom prst="rect">
             <a:avLst/>
@@ -2162,73 +2254,113 @@
           <a:bodyPr wrap="square" rtlCol="0" anchor="ctr"/>
           <a:lstStyle/>
           <a:p>
-            <a:pPr marL="0" indent="0">
+            <a:pPr marL="0" indent="0" algn="just">
               <a:buNone/>
             </a:pPr>
             <a:r>
-              <a:rPr lang="en-US" sz="1100" b="1" dirty="0">
+              <a:rPr lang="es-MX" sz="1300" b="1" dirty="0">
                 <a:solidFill>
                   <a:srgbClr val="D4AC0D"/>
                 </a:solidFill>
+                <a:latin typeface="Cambria" pitchFamily="34" charset="0"/>
+                <a:ea typeface="Cambria" pitchFamily="34" charset="-122"/>
+              </a:rPr>
+              <a:t>¿Qué jugadores de C1 (baja participación) tienen un ratio goles/minuto comparable al de los jugadores de C2, y podrían ser promovidos a titulares sin riesgo de caída en rendimiento ofensivo? </a:t>
+            </a:r>
+            <a:r>
+              <a:rPr lang="es-MX" sz="1300" b="1" dirty="0">
+                <a:solidFill>
+                  <a:srgbClr val="FF0000"/>
+                </a:solidFill>
+                <a:latin typeface="Cambria" pitchFamily="34" charset="0"/>
+                <a:ea typeface="Cambria" pitchFamily="34" charset="-122"/>
+              </a:rPr>
+              <a:t>k-</a:t>
+            </a:r>
+            <a:r>
+              <a:rPr lang="es-MX" sz="1300" b="1" dirty="0" err="1">
+                <a:solidFill>
+                  <a:srgbClr val="FF0000"/>
+                </a:solidFill>
+                <a:latin typeface="Cambria" pitchFamily="34" charset="0"/>
+                <a:ea typeface="Cambria" pitchFamily="34" charset="-122"/>
+              </a:rPr>
+              <a:t>Means</a:t>
+            </a:r>
+            <a:r>
+              <a:rPr lang="es-MX" sz="1300" b="1" dirty="0">
+                <a:solidFill>
+                  <a:srgbClr val="FF0000"/>
+                </a:solidFill>
+                <a:latin typeface="Cambria" pitchFamily="34" charset="0"/>
+                <a:ea typeface="Cambria" pitchFamily="34" charset="-122"/>
+              </a:rPr>
+              <a:t> Orange</a:t>
+            </a:r>
+            <a:endParaRPr lang="en-US" sz="1300" b="1" dirty="0">
+              <a:solidFill>
+                <a:srgbClr val="FF0000"/>
+              </a:solidFill>
+              <a:latin typeface="Cambria" pitchFamily="34" charset="0"/>
+              <a:ea typeface="Cambria" pitchFamily="34" charset="-122"/>
+            </a:endParaRPr>
+          </a:p>
+        </p:txBody>
+      </p:sp>
+      <p:sp>
+        <p:nvSpPr>
+          <p:cNvPr id="9" name="Text 7"/>
+          <p:cNvSpPr/>
+          <p:nvPr/>
+        </p:nvSpPr>
+        <p:spPr>
+          <a:xfrm>
+            <a:off x="787791" y="1421892"/>
+            <a:ext cx="7990448" cy="928116"/>
+          </a:xfrm>
+          <a:prstGeom prst="rect">
+            <a:avLst/>
+          </a:prstGeom>
+          <a:noFill/>
+          <a:ln/>
+        </p:spPr>
+        <p:txBody>
+          <a:bodyPr wrap="square" rtlCol="0" anchor="ctr"/>
+          <a:lstStyle/>
+          <a:p>
+            <a:pPr marL="0" indent="0" algn="just">
+              <a:buNone/>
+            </a:pPr>
+            <a:r>
+              <a:rPr lang="es-MX" sz="1200" dirty="0"/>
+              <a:t>La respuesta está en los puntos azules que aparecen en la parte superior izquierda del gráfico </a:t>
+            </a:r>
+            <a:r>
+              <a:rPr lang="en-US" sz="1200" b="1" dirty="0">
                 <a:latin typeface="Cambria" pitchFamily="34" charset="0"/>
                 <a:ea typeface="Cambria" pitchFamily="34" charset="-122"/>
                 <a:cs typeface="Cambria" pitchFamily="34" charset="-120"/>
               </a:rPr>
-              <a:t>¿Qué jugadores son candidatos a titularidad?</a:t>
-            </a:r>
-            <a:endParaRPr lang="en-US" sz="1100" dirty="0"/>
-          </a:p>
-        </p:txBody>
-      </p:sp>
-      <p:sp>
-        <p:nvSpPr>
-          <p:cNvPr id="9" name="Text 7"/>
-          <p:cNvSpPr/>
-          <p:nvPr/>
-        </p:nvSpPr>
-        <p:spPr>
-          <a:xfrm>
-            <a:off x="658368" y="1243584"/>
-            <a:ext cx="3749040" cy="1207008"/>
-          </a:xfrm>
-          <a:prstGeom prst="rect">
-            <a:avLst/>
-          </a:prstGeom>
-          <a:noFill/>
-          <a:ln/>
-        </p:spPr>
-        <p:txBody>
-          <a:bodyPr wrap="square" rtlCol="0" anchor="ctr"/>
-          <a:lstStyle/>
-          <a:p>
-            <a:pPr marL="0" indent="0">
-              <a:buNone/>
-            </a:pPr>
-            <a:r>
-              <a:rPr lang="en-US" sz="1100" dirty="0">
-                <a:solidFill>
-                  <a:srgbClr val="1A1A2E"/>
-                </a:solidFill>
-                <a:latin typeface="Calibri" pitchFamily="34" charset="0"/>
-                <a:ea typeface="Calibri" pitchFamily="34" charset="-122"/>
-                <a:cs typeface="Calibri" pitchFamily="34" charset="-120"/>
-              </a:rPr>
-              <a:t>C2 (alta participación) identifica jugadores con minutos suficientes para ser considerados pilares del equipo.</a:t>
-            </a:r>
-            <a:endParaRPr lang="en-US" sz="1100" dirty="0"/>
-          </a:p>
-        </p:txBody>
-      </p:sp>
-      <p:sp>
-        <p:nvSpPr>
-          <p:cNvPr id="10" name="Shape 8"/>
-          <p:cNvSpPr/>
-          <p:nvPr/>
-        </p:nvSpPr>
-        <p:spPr>
-          <a:xfrm>
-            <a:off x="4709160" y="822960"/>
-            <a:ext cx="4206240" cy="1737360"/>
+              <a:t>→</a:t>
+            </a:r>
+            <a:r>
+              <a:rPr lang="es-MX" sz="1200" dirty="0"/>
+              <a:t>  jugadores con pocos minutos pero que ya anotaron 3-5 goles, lo que sugiere alta efectividad en tiempo reducido. Identificarlos permite a los cuerpos técnicos tomar decisiones de rotación basadas en datos.</a:t>
+            </a:r>
+            <a:endParaRPr lang="en-US" sz="1200" dirty="0"/>
+          </a:p>
+        </p:txBody>
+      </p:sp>
+      <p:sp>
+        <p:nvSpPr>
+          <p:cNvPr id="16" name="Shape 14"/>
+          <p:cNvSpPr/>
+          <p:nvPr/>
+        </p:nvSpPr>
+        <p:spPr>
+          <a:xfrm>
+            <a:off x="787791" y="2743200"/>
+            <a:ext cx="7990447" cy="1737360"/>
           </a:xfrm>
           <a:prstGeom prst="rect">
             <a:avLst/>
@@ -2253,14 +2385,84 @@
       </p:sp>
       <p:sp>
         <p:nvSpPr>
-          <p:cNvPr id="11" name="Shape 9"/>
-          <p:cNvSpPr/>
-          <p:nvPr/>
-        </p:nvSpPr>
-        <p:spPr>
-          <a:xfrm>
-            <a:off x="4709160" y="822960"/>
-            <a:ext cx="4206240" cy="347472"/>
+          <p:cNvPr id="18" name="Shape 16"/>
+          <p:cNvSpPr/>
+          <p:nvPr/>
+        </p:nvSpPr>
+        <p:spPr>
+          <a:xfrm>
+            <a:off x="495183" y="2743200"/>
+            <a:ext cx="292608" cy="1737360"/>
+          </a:xfrm>
+          <a:prstGeom prst="rect">
+            <a:avLst/>
+          </a:prstGeom>
+          <a:solidFill>
+            <a:srgbClr val="C0392B"/>
+          </a:solidFill>
+          <a:ln w="12700">
+            <a:solidFill>
+              <a:srgbClr val="C0392B"/>
+            </a:solidFill>
+            <a:prstDash val="solid"/>
+          </a:ln>
+        </p:spPr>
+      </p:sp>
+      <p:sp>
+        <p:nvSpPr>
+          <p:cNvPr id="19" name="Text 17"/>
+          <p:cNvSpPr/>
+          <p:nvPr/>
+        </p:nvSpPr>
+        <p:spPr>
+          <a:xfrm>
+            <a:off x="492369" y="3419856"/>
+            <a:ext cx="292608" cy="384048"/>
+          </a:xfrm>
+          <a:prstGeom prst="rect">
+            <a:avLst/>
+          </a:prstGeom>
+          <a:noFill/>
+          <a:ln/>
+        </p:spPr>
+        <p:txBody>
+          <a:bodyPr wrap="square" rtlCol="0" anchor="ctr"/>
+          <a:lstStyle/>
+          <a:p>
+            <a:pPr marL="0" indent="0" algn="ctr">
+              <a:buNone/>
+            </a:pPr>
+            <a:r>
+              <a:rPr lang="en-US" sz="1300" b="1" dirty="0">
+                <a:solidFill>
+                  <a:srgbClr val="FFFFFF"/>
+                </a:solidFill>
+                <a:latin typeface="Cambria" pitchFamily="34" charset="0"/>
+                <a:ea typeface="Cambria" pitchFamily="34" charset="-122"/>
+                <a:cs typeface="Cambria" pitchFamily="34" charset="-120"/>
+              </a:rPr>
+              <a:t>P2</a:t>
+            </a:r>
+            <a:endParaRPr lang="en-US" sz="1300" dirty="0"/>
+          </a:p>
+        </p:txBody>
+      </p:sp>
+      <p:sp>
+        <p:nvSpPr>
+          <p:cNvPr id="30" name="Shape 3">
+            <a:extLst>
+              <a:ext uri="{FF2B5EF4-FFF2-40B4-BE49-F238E27FC236}">
+                <a16:creationId xmlns:a16="http://schemas.microsoft.com/office/drawing/2014/main" id="{2CC8F6D2-2CE6-D9AA-2ACB-EEDD218D99E0}"/>
+              </a:ext>
+            </a:extLst>
+          </p:cNvPr>
+          <p:cNvSpPr/>
+          <p:nvPr/>
+        </p:nvSpPr>
+        <p:spPr>
+          <a:xfrm>
+            <a:off x="805373" y="2743200"/>
+            <a:ext cx="7972867" cy="585216"/>
           </a:xfrm>
           <a:prstGeom prst="rect">
             <a:avLst/>
@@ -2278,24 +2480,133 @@
       </p:sp>
       <p:sp>
         <p:nvSpPr>
-          <p:cNvPr id="12" name="Shape 10"/>
-          <p:cNvSpPr/>
-          <p:nvPr/>
-        </p:nvSpPr>
-        <p:spPr>
-          <a:xfrm>
-            <a:off x="4709160" y="822960"/>
-            <a:ext cx="292608" cy="1737360"/>
+          <p:cNvPr id="20" name="Text 18"/>
+          <p:cNvSpPr/>
+          <p:nvPr/>
+        </p:nvSpPr>
+        <p:spPr>
+          <a:xfrm>
+            <a:off x="787790" y="2738276"/>
+            <a:ext cx="7990449" cy="585217"/>
+          </a:xfrm>
+          <a:prstGeom prst="rect">
+            <a:avLst/>
+          </a:prstGeom>
+          <a:noFill/>
+          <a:ln/>
+        </p:spPr>
+        <p:txBody>
+          <a:bodyPr wrap="square" rtlCol="0" anchor="ctr"/>
+          <a:lstStyle/>
+          <a:p>
+            <a:pPr marL="0" indent="0" algn="just">
+              <a:buNone/>
+            </a:pPr>
+            <a:r>
+              <a:rPr lang="es-MX" sz="1300" b="1" dirty="0">
+                <a:solidFill>
+                  <a:srgbClr val="D4AC0D"/>
+                </a:solidFill>
+                <a:latin typeface="Cambria" pitchFamily="34" charset="0"/>
+                <a:ea typeface="Cambria" pitchFamily="34" charset="-122"/>
+              </a:rPr>
+              <a:t>¿Los equipos que concentran más jugadores en C1 (lanzadores de penales efectivos) tienen mejor rendimiento general, o tener un ejecutor designado claro es simplemente un indicador de jerarquía dentro del equipo sin impacto directo en resultados?</a:t>
+            </a:r>
+            <a:r>
+              <a:rPr lang="en-US" sz="1300" b="1" dirty="0">
+                <a:solidFill>
+                  <a:srgbClr val="D4AC0D"/>
+                </a:solidFill>
+                <a:latin typeface="Cambria" pitchFamily="34" charset="0"/>
+                <a:ea typeface="Cambria" pitchFamily="34" charset="-122"/>
+              </a:rPr>
+              <a:t>  </a:t>
+            </a:r>
+            <a:r>
+              <a:rPr lang="en-US" sz="1300" b="1" dirty="0">
+                <a:solidFill>
+                  <a:srgbClr val="FF0000"/>
+                </a:solidFill>
+                <a:latin typeface="Cambria" pitchFamily="34" charset="0"/>
+                <a:ea typeface="Cambria" pitchFamily="34" charset="-122"/>
+              </a:rPr>
+              <a:t>Clustering </a:t>
+            </a:r>
+            <a:r>
+              <a:rPr lang="en-US" sz="1300" b="1" dirty="0" err="1">
+                <a:solidFill>
+                  <a:srgbClr val="FF0000"/>
+                </a:solidFill>
+                <a:latin typeface="Cambria" pitchFamily="34" charset="0"/>
+                <a:ea typeface="Cambria" pitchFamily="34" charset="-122"/>
+              </a:rPr>
+              <a:t>jerárquico</a:t>
+            </a:r>
+            <a:r>
+              <a:rPr lang="en-US" sz="1300" b="1" dirty="0">
+                <a:solidFill>
+                  <a:srgbClr val="FF0000"/>
+                </a:solidFill>
+                <a:latin typeface="Cambria" pitchFamily="34" charset="0"/>
+                <a:ea typeface="Cambria" pitchFamily="34" charset="-122"/>
+              </a:rPr>
+              <a:t> Orange</a:t>
+            </a:r>
+          </a:p>
+        </p:txBody>
+      </p:sp>
+      <p:sp>
+        <p:nvSpPr>
+          <p:cNvPr id="21" name="Text 19"/>
+          <p:cNvSpPr/>
+          <p:nvPr/>
+        </p:nvSpPr>
+        <p:spPr>
+          <a:xfrm>
+            <a:off x="787791" y="3341780"/>
+            <a:ext cx="7990446" cy="1127525"/>
+          </a:xfrm>
+          <a:prstGeom prst="rect">
+            <a:avLst/>
+          </a:prstGeom>
+          <a:noFill/>
+          <a:ln/>
+        </p:spPr>
+        <p:txBody>
+          <a:bodyPr wrap="square" rtlCol="0" anchor="ctr"/>
+          <a:lstStyle/>
+          <a:p>
+            <a:pPr marL="0" indent="0" algn="just">
+              <a:buNone/>
+            </a:pPr>
+            <a:r>
+              <a:rPr lang="es-MX" sz="1200" dirty="0"/>
+              <a:t>La pregunta tiene valor real para directores deportivos: si C1 está dominado por jugadores de ciertos equipos o ligas, se puede inferir si la especialización en roles de penal correlaciona con estructuras tácticas más definidas y potencialmente más exitosas.</a:t>
+            </a:r>
+            <a:endParaRPr lang="en-US" sz="1200" dirty="0"/>
+          </a:p>
+        </p:txBody>
+      </p:sp>
+      <p:sp>
+        <p:nvSpPr>
+          <p:cNvPr id="28" name="Shape 26"/>
+          <p:cNvSpPr/>
+          <p:nvPr/>
+        </p:nvSpPr>
+        <p:spPr>
+          <a:xfrm>
+            <a:off x="0" y="4873752"/>
+            <a:ext cx="9144000" cy="269748"/>
           </a:xfrm>
           <a:prstGeom prst="rect">
             <a:avLst/>
           </a:prstGeom>
           <a:solidFill>
-            <a:srgbClr val="C0392B"/>
+            <a:srgbClr val="9B1C1C"/>
           </a:solidFill>
           <a:ln w="12700">
             <a:solidFill>
-              <a:srgbClr val="C0392B"/>
+              <a:srgbClr val="9B1C1C"/>
             </a:solidFill>
             <a:prstDash val="solid"/>
           </a:ln>
@@ -2303,14 +2614,14 @@
       </p:sp>
       <p:sp>
         <p:nvSpPr>
-          <p:cNvPr id="13" name="Text 11"/>
-          <p:cNvSpPr/>
-          <p:nvPr/>
-        </p:nvSpPr>
-        <p:spPr>
-          <a:xfrm>
-            <a:off x="4709160" y="1499616"/>
-            <a:ext cx="292608" cy="384048"/>
+          <p:cNvPr id="29" name="Text 27"/>
+          <p:cNvSpPr/>
+          <p:nvPr/>
+        </p:nvSpPr>
+        <p:spPr>
+          <a:xfrm>
+            <a:off x="365760" y="4892040"/>
+            <a:ext cx="8412480" cy="237744"/>
           </a:xfrm>
           <a:prstGeom prst="rect">
             <a:avLst/>
@@ -2322,11 +2633,108 @@
           <a:bodyPr wrap="square" rtlCol="0" anchor="ctr"/>
           <a:lstStyle/>
           <a:p>
-            <a:pPr marL="0" indent="0" algn="ctr">
+            <a:pPr marL="0" indent="0" algn="r">
               <a:buNone/>
             </a:pPr>
             <a:r>
-              <a:rPr lang="en-US" sz="1300" b="1" dirty="0">
+              <a:rPr lang="en-US" sz="1000" dirty="0">
+                <a:solidFill>
+                  <a:srgbClr val="FAF0E6"/>
+                </a:solidFill>
+                <a:latin typeface="Calibri" pitchFamily="34" charset="0"/>
+                <a:ea typeface="Calibri" pitchFamily="34" charset="-122"/>
+                <a:cs typeface="Calibri" pitchFamily="34" charset="-120"/>
+              </a:rPr>
+              <a:t>Taller 2  ·  Aprendizaje No Supervisado</a:t>
+            </a:r>
+            <a:endParaRPr lang="en-US" sz="1000" dirty="0"/>
+          </a:p>
+        </p:txBody>
+      </p:sp>
+    </p:spTree>
+  </p:cSld>
+  <p:clrMapOvr>
+    <a:masterClrMapping/>
+  </p:clrMapOvr>
+</p:sld>
+</file>
+
+<file path=ppt/slides/slide11.xml><?xml version="1.0" encoding="utf-8"?>
+<p:sld xmlns:a="http://schemas.openxmlformats.org/drawingml/2006/main" xmlns:r="http://schemas.openxmlformats.org/officeDocument/2006/relationships" xmlns:p="http://schemas.openxmlformats.org/presentationml/2006/main">
+  <p:cSld>
+    <p:bg>
+      <p:bgPr>
+        <a:solidFill>
+          <a:srgbClr val="FAF0E6"/>
+        </a:solidFill>
+        <a:effectLst/>
+      </p:bgPr>
+    </p:bg>
+    <p:spTree>
+      <p:nvGrpSpPr>
+        <p:cNvPr id="1" name=""/>
+        <p:cNvGrpSpPr/>
+        <p:nvPr/>
+      </p:nvGrpSpPr>
+      <p:grpSpPr>
+        <a:xfrm>
+          <a:off x="0" y="0"/>
+          <a:ext cx="0" cy="0"/>
+          <a:chOff x="0" y="0"/>
+          <a:chExt cx="0" cy="0"/>
+        </a:xfrm>
+      </p:grpSpPr>
+      <p:sp>
+        <p:nvSpPr>
+          <p:cNvPr id="2" name="Shape 0"/>
+          <p:cNvSpPr/>
+          <p:nvPr/>
+        </p:nvSpPr>
+        <p:spPr>
+          <a:xfrm>
+            <a:off x="0" y="0"/>
+            <a:ext cx="9144000" cy="685800"/>
+          </a:xfrm>
+          <a:prstGeom prst="rect">
+            <a:avLst/>
+          </a:prstGeom>
+          <a:solidFill>
+            <a:srgbClr val="9B1C1C"/>
+          </a:solidFill>
+          <a:ln w="12700">
+            <a:solidFill>
+              <a:srgbClr val="9B1C1C"/>
+            </a:solidFill>
+            <a:prstDash val="solid"/>
+          </a:ln>
+        </p:spPr>
+      </p:sp>
+      <p:sp>
+        <p:nvSpPr>
+          <p:cNvPr id="3" name="Text 1"/>
+          <p:cNvSpPr/>
+          <p:nvPr/>
+        </p:nvSpPr>
+        <p:spPr>
+          <a:xfrm>
+            <a:off x="365760" y="91440"/>
+            <a:ext cx="8412480" cy="502920"/>
+          </a:xfrm>
+          <a:prstGeom prst="rect">
+            <a:avLst/>
+          </a:prstGeom>
+          <a:noFill/>
+          <a:ln/>
+        </p:spPr>
+        <p:txBody>
+          <a:bodyPr wrap="square" rtlCol="0" anchor="ctr"/>
+          <a:lstStyle/>
+          <a:p>
+            <a:pPr marL="0" indent="0">
+              <a:buNone/>
+            </a:pPr>
+            <a:r>
+              <a:rPr lang="en-US" sz="2200" b="1" dirty="0">
                 <a:solidFill>
                   <a:srgbClr val="FFFFFF"/>
                 </a:solidFill>
@@ -2334,100 +2742,22 @@
                 <a:ea typeface="Cambria" pitchFamily="34" charset="-122"/>
                 <a:cs typeface="Cambria" pitchFamily="34" charset="-120"/>
               </a:rPr>
-              <a:t>Q2</a:t>
-            </a:r>
-            <a:endParaRPr lang="en-US" sz="1300" dirty="0"/>
-          </a:p>
-        </p:txBody>
-      </p:sp>
-      <p:sp>
-        <p:nvSpPr>
-          <p:cNvPr id="14" name="Text 12"/>
-          <p:cNvSpPr/>
-          <p:nvPr/>
-        </p:nvSpPr>
-        <p:spPr>
-          <a:xfrm>
-            <a:off x="5093208" y="859536"/>
-            <a:ext cx="3749040" cy="274320"/>
-          </a:xfrm>
-          <a:prstGeom prst="rect">
-            <a:avLst/>
-          </a:prstGeom>
-          <a:noFill/>
-          <a:ln/>
-        </p:spPr>
-        <p:txBody>
-          <a:bodyPr wrap="square" rtlCol="0" anchor="ctr"/>
-          <a:lstStyle/>
-          <a:p>
-            <a:pPr marL="0" indent="0">
-              <a:buNone/>
-            </a:pPr>
-            <a:r>
-              <a:rPr lang="en-US" sz="1100" b="1" dirty="0">
-                <a:solidFill>
-                  <a:srgbClr val="D4AC0D"/>
-                </a:solidFill>
-                <a:latin typeface="Cambria" pitchFamily="34" charset="0"/>
-                <a:ea typeface="Cambria" pitchFamily="34" charset="-122"/>
-                <a:cs typeface="Cambria" pitchFamily="34" charset="-120"/>
-              </a:rPr>
-              <a:t>¿Dónde hay talento sub-utilizado?</a:t>
-            </a:r>
-            <a:endParaRPr lang="en-US" sz="1100" dirty="0"/>
-          </a:p>
-        </p:txBody>
-      </p:sp>
-      <p:sp>
-        <p:nvSpPr>
-          <p:cNvPr id="15" name="Text 13"/>
-          <p:cNvSpPr/>
-          <p:nvPr/>
-        </p:nvSpPr>
-        <p:spPr>
-          <a:xfrm>
-            <a:off x="5093208" y="1243584"/>
-            <a:ext cx="3749040" cy="1207008"/>
-          </a:xfrm>
-          <a:prstGeom prst="rect">
-            <a:avLst/>
-          </a:prstGeom>
-          <a:noFill/>
-          <a:ln/>
-        </p:spPr>
-        <p:txBody>
-          <a:bodyPr wrap="square" rtlCol="0" anchor="ctr"/>
-          <a:lstStyle/>
-          <a:p>
-            <a:pPr marL="0" indent="0">
-              <a:buNone/>
-            </a:pPr>
-            <a:r>
-              <a:rPr lang="en-US" sz="1100" dirty="0">
-                <a:solidFill>
-                  <a:srgbClr val="1A1A2E"/>
-                </a:solidFill>
-                <a:latin typeface="Calibri" pitchFamily="34" charset="0"/>
-                <a:ea typeface="Calibri" pitchFamily="34" charset="-122"/>
-                <a:cs typeface="Calibri" pitchFamily="34" charset="-120"/>
-              </a:rPr>
-              <a:t>C1 concentra jugadores con potencial pero escasa continuidad — candidatos a cesión o desarrollo en divisiones inferiores.</a:t>
-            </a:r>
-            <a:endParaRPr lang="en-US" sz="1100" dirty="0"/>
-          </a:p>
-        </p:txBody>
-      </p:sp>
-      <p:sp>
-        <p:nvSpPr>
-          <p:cNvPr id="16" name="Shape 14"/>
-          <p:cNvSpPr/>
-          <p:nvPr/>
-        </p:nvSpPr>
-        <p:spPr>
-          <a:xfrm>
-            <a:off x="274320" y="2743200"/>
-            <a:ext cx="4206240" cy="1737360"/>
+              <a:t>09  Preguntas con valor de negocio</a:t>
+            </a:r>
+            <a:endParaRPr lang="en-US" sz="2200" dirty="0"/>
+          </a:p>
+        </p:txBody>
+      </p:sp>
+      <p:sp>
+        <p:nvSpPr>
+          <p:cNvPr id="4" name="Shape 2"/>
+          <p:cNvSpPr/>
+          <p:nvPr/>
+        </p:nvSpPr>
+        <p:spPr>
+          <a:xfrm>
+            <a:off x="784976" y="1840230"/>
+            <a:ext cx="7990449" cy="1471656"/>
           </a:xfrm>
           <a:prstGeom prst="rect">
             <a:avLst/>
@@ -2449,17 +2779,24 @@
             </a:outerShdw>
           </a:effectLst>
         </p:spPr>
-      </p:sp>
-      <p:sp>
-        <p:nvSpPr>
-          <p:cNvPr id="17" name="Shape 15"/>
-          <p:cNvSpPr/>
-          <p:nvPr/>
-        </p:nvSpPr>
-        <p:spPr>
-          <a:xfrm>
-            <a:off x="274320" y="2743200"/>
-            <a:ext cx="4206240" cy="347472"/>
+        <p:txBody>
+          <a:bodyPr/>
+          <a:lstStyle/>
+          <a:p>
+            <a:endParaRPr lang="es-CO" dirty="0"/>
+          </a:p>
+        </p:txBody>
+      </p:sp>
+      <p:sp>
+        <p:nvSpPr>
+          <p:cNvPr id="5" name="Shape 3"/>
+          <p:cNvSpPr/>
+          <p:nvPr/>
+        </p:nvSpPr>
+        <p:spPr>
+          <a:xfrm>
+            <a:off x="790605" y="1843219"/>
+            <a:ext cx="7990449" cy="585216"/>
           </a:xfrm>
           <a:prstGeom prst="rect">
             <a:avLst/>
@@ -2477,14 +2814,14 @@
       </p:sp>
       <p:sp>
         <p:nvSpPr>
-          <p:cNvPr id="18" name="Shape 16"/>
-          <p:cNvSpPr/>
-          <p:nvPr/>
-        </p:nvSpPr>
-        <p:spPr>
-          <a:xfrm>
-            <a:off x="274320" y="2743200"/>
-            <a:ext cx="292608" cy="1737360"/>
+          <p:cNvPr id="6" name="Shape 4"/>
+          <p:cNvSpPr/>
+          <p:nvPr/>
+        </p:nvSpPr>
+        <p:spPr>
+          <a:xfrm>
+            <a:off x="492369" y="1840230"/>
+            <a:ext cx="292608" cy="1463040"/>
           </a:xfrm>
           <a:prstGeom prst="rect">
             <a:avLst/>
@@ -2499,16 +2836,23 @@
             <a:prstDash val="solid"/>
           </a:ln>
         </p:spPr>
-      </p:sp>
-      <p:sp>
-        <p:nvSpPr>
-          <p:cNvPr id="19" name="Text 17"/>
-          <p:cNvSpPr/>
-          <p:nvPr/>
-        </p:nvSpPr>
-        <p:spPr>
-          <a:xfrm>
-            <a:off x="274320" y="3419856"/>
+        <p:txBody>
+          <a:bodyPr/>
+          <a:lstStyle/>
+          <a:p>
+            <a:endParaRPr lang="es-CO" dirty="0"/>
+          </a:p>
+        </p:txBody>
+      </p:sp>
+      <p:sp>
+        <p:nvSpPr>
+          <p:cNvPr id="7" name="Text 5"/>
+          <p:cNvSpPr/>
+          <p:nvPr/>
+        </p:nvSpPr>
+        <p:spPr>
+          <a:xfrm>
+            <a:off x="495183" y="2360383"/>
             <a:ext cx="292608" cy="384048"/>
           </a:xfrm>
           <a:prstGeom prst="rect">
@@ -2533,7 +2877,7 @@
                 <a:ea typeface="Cambria" pitchFamily="34" charset="-122"/>
                 <a:cs typeface="Cambria" pitchFamily="34" charset="-120"/>
               </a:rPr>
-              <a:t>Q3</a:t>
+              <a:t>P3</a:t>
             </a:r>
             <a:endParaRPr lang="en-US" sz="1300" dirty="0"/>
           </a:p>
@@ -2541,14 +2885,14 @@
       </p:sp>
       <p:sp>
         <p:nvSpPr>
-          <p:cNvPr id="20" name="Text 18"/>
-          <p:cNvSpPr/>
-          <p:nvPr/>
-        </p:nvSpPr>
-        <p:spPr>
-          <a:xfrm>
-            <a:off x="658368" y="2779776"/>
-            <a:ext cx="3749040" cy="274320"/>
+          <p:cNvPr id="8" name="Text 6"/>
+          <p:cNvSpPr/>
+          <p:nvPr/>
+        </p:nvSpPr>
+        <p:spPr>
+          <a:xfrm>
+            <a:off x="779347" y="1820887"/>
+            <a:ext cx="7990449" cy="598932"/>
           </a:xfrm>
           <a:prstGeom prst="rect">
             <a:avLst/>
@@ -2560,259 +2904,86 @@
           <a:bodyPr wrap="square" rtlCol="0" anchor="ctr"/>
           <a:lstStyle/>
           <a:p>
-            <a:pPr marL="0" indent="0">
+            <a:pPr marL="0" indent="0" algn="just">
               <a:buNone/>
             </a:pPr>
             <a:r>
-              <a:rPr lang="en-US" sz="1100" b="1" dirty="0">
+              <a:rPr lang="es-MX" sz="1300" b="1" dirty="0">
                 <a:solidFill>
                   <a:srgbClr val="D4AC0D"/>
                 </a:solidFill>
                 <a:latin typeface="Cambria" pitchFamily="34" charset="0"/>
                 <a:ea typeface="Cambria" pitchFamily="34" charset="-122"/>
-                <a:cs typeface="Cambria" pitchFamily="34" charset="-120"/>
-              </a:rPr>
-              <a:t>¿Cómo comparar el valor real de un fichaje?</a:t>
-            </a:r>
-            <a:endParaRPr lang="en-US" sz="1100" dirty="0"/>
-          </a:p>
-        </p:txBody>
-      </p:sp>
-      <p:sp>
-        <p:nvSpPr>
-          <p:cNvPr id="21" name="Text 19"/>
-          <p:cNvSpPr/>
-          <p:nvPr/>
-        </p:nvSpPr>
-        <p:spPr>
-          <a:xfrm>
-            <a:off x="658368" y="3163824"/>
-            <a:ext cx="3749040" cy="1207008"/>
-          </a:xfrm>
-          <a:prstGeom prst="rect">
-            <a:avLst/>
-          </a:prstGeom>
-          <a:noFill/>
-          <a:ln/>
-        </p:spPr>
-        <p:txBody>
-          <a:bodyPr wrap="square" rtlCol="0" anchor="ctr"/>
-          <a:lstStyle/>
-          <a:p>
-            <a:pPr marL="0" indent="0">
-              <a:buNone/>
-            </a:pPr>
-            <a:r>
-              <a:rPr lang="en-US" sz="1100" dirty="0">
-                <a:solidFill>
-                  <a:srgbClr val="1A1A2E"/>
-                </a:solidFill>
-                <a:latin typeface="Calibri" pitchFamily="34" charset="0"/>
-                <a:ea typeface="Calibri" pitchFamily="34" charset="-122"/>
-                <a:cs typeface="Calibri" pitchFamily="34" charset="-120"/>
-              </a:rPr>
-              <a:t>Un jugador de C2 en una liga menor vs uno de C2 en la Premier League permite calibrar el nivel de exigencia al mismo perfil.</a:t>
-            </a:r>
-            <a:endParaRPr lang="en-US" sz="1100" dirty="0"/>
-          </a:p>
-        </p:txBody>
-      </p:sp>
-      <p:sp>
-        <p:nvSpPr>
-          <p:cNvPr id="22" name="Shape 20"/>
-          <p:cNvSpPr/>
-          <p:nvPr/>
-        </p:nvSpPr>
-        <p:spPr>
-          <a:xfrm>
-            <a:off x="4709160" y="2743200"/>
-            <a:ext cx="4206240" cy="1737360"/>
-          </a:xfrm>
-          <a:prstGeom prst="rect">
-            <a:avLst/>
-          </a:prstGeom>
-          <a:solidFill>
-            <a:srgbClr val="FFFFFF"/>
-          </a:solidFill>
-          <a:ln w="12700">
-            <a:solidFill>
-              <a:srgbClr val="F2F2F2"/>
-            </a:solidFill>
-            <a:prstDash val="solid"/>
-          </a:ln>
-          <a:effectLst>
-            <a:outerShdw blurRad="101600" dist="38100" dir="8100000" algn="bl" rotWithShape="0">
-              <a:srgbClr val="000000">
-                <a:alpha val="18000"/>
-              </a:srgbClr>
-            </a:outerShdw>
-          </a:effectLst>
-        </p:spPr>
-      </p:sp>
-      <p:sp>
-        <p:nvSpPr>
-          <p:cNvPr id="23" name="Shape 21"/>
-          <p:cNvSpPr/>
-          <p:nvPr/>
-        </p:nvSpPr>
-        <p:spPr>
-          <a:xfrm>
-            <a:off x="4709160" y="2743200"/>
-            <a:ext cx="4206240" cy="347472"/>
-          </a:xfrm>
-          <a:prstGeom prst="rect">
-            <a:avLst/>
-          </a:prstGeom>
-          <a:solidFill>
-            <a:srgbClr val="1A1A2E"/>
-          </a:solidFill>
-          <a:ln w="12700">
-            <a:solidFill>
-              <a:srgbClr val="1A1A2E"/>
-            </a:solidFill>
-            <a:prstDash val="solid"/>
-          </a:ln>
-        </p:spPr>
-      </p:sp>
-      <p:sp>
-        <p:nvSpPr>
-          <p:cNvPr id="24" name="Shape 22"/>
-          <p:cNvSpPr/>
-          <p:nvPr/>
-        </p:nvSpPr>
-        <p:spPr>
-          <a:xfrm>
-            <a:off x="4709160" y="2743200"/>
-            <a:ext cx="292608" cy="1737360"/>
-          </a:xfrm>
-          <a:prstGeom prst="rect">
-            <a:avLst/>
-          </a:prstGeom>
-          <a:solidFill>
-            <a:srgbClr val="C0392B"/>
-          </a:solidFill>
-          <a:ln w="12700">
-            <a:solidFill>
-              <a:srgbClr val="C0392B"/>
-            </a:solidFill>
-            <a:prstDash val="solid"/>
-          </a:ln>
-        </p:spPr>
-      </p:sp>
-      <p:sp>
-        <p:nvSpPr>
-          <p:cNvPr id="25" name="Text 23"/>
-          <p:cNvSpPr/>
-          <p:nvPr/>
-        </p:nvSpPr>
-        <p:spPr>
-          <a:xfrm>
-            <a:off x="4709160" y="3419856"/>
-            <a:ext cx="292608" cy="384048"/>
-          </a:xfrm>
-          <a:prstGeom prst="rect">
-            <a:avLst/>
-          </a:prstGeom>
-          <a:noFill/>
-          <a:ln/>
-        </p:spPr>
-        <p:txBody>
-          <a:bodyPr wrap="square" rtlCol="0" anchor="ctr"/>
-          <a:lstStyle/>
-          <a:p>
-            <a:pPr marL="0" indent="0" algn="ctr">
-              <a:buNone/>
-            </a:pPr>
+              </a:rPr>
+              <a:t>¿Cuál es el perfil mínimo de partidos jugados y contribuciones directas (goles + asistencias) que separa a un jugador de impacto real (morado) de uno de rol secundario (amarillo), y ese umbral varía entre ligas? </a:t>
+            </a:r>
             <a:r>
               <a:rPr lang="en-US" sz="1300" b="1" dirty="0">
                 <a:solidFill>
-                  <a:srgbClr val="FFFFFF"/>
-                </a:solidFill>
-                <a:latin typeface="Cambria" pitchFamily="34" charset="0"/>
-                <a:ea typeface="Cambria" pitchFamily="34" charset="-122"/>
-                <a:cs typeface="Cambria" pitchFamily="34" charset="-120"/>
-              </a:rPr>
-              <a:t>Q4</a:t>
-            </a:r>
-            <a:endParaRPr lang="en-US" sz="1300" dirty="0"/>
-          </a:p>
-        </p:txBody>
-      </p:sp>
-      <p:sp>
-        <p:nvSpPr>
-          <p:cNvPr id="26" name="Text 24"/>
-          <p:cNvSpPr/>
-          <p:nvPr/>
-        </p:nvSpPr>
-        <p:spPr>
-          <a:xfrm>
-            <a:off x="5093208" y="2779776"/>
-            <a:ext cx="3749040" cy="274320"/>
-          </a:xfrm>
-          <a:prstGeom prst="rect">
-            <a:avLst/>
-          </a:prstGeom>
-          <a:noFill/>
-          <a:ln/>
-        </p:spPr>
-        <p:txBody>
-          <a:bodyPr wrap="square" rtlCol="0" anchor="ctr"/>
-          <a:lstStyle/>
-          <a:p>
-            <a:pPr marL="0" indent="0">
-              <a:buNone/>
-            </a:pPr>
-            <a:r>
-              <a:rPr lang="en-US" sz="1100" b="1" dirty="0">
-                <a:solidFill>
-                  <a:srgbClr val="D4AC0D"/>
-                </a:solidFill>
-                <a:latin typeface="Cambria" pitchFamily="34" charset="0"/>
-                <a:ea typeface="Cambria" pitchFamily="34" charset="-122"/>
-                <a:cs typeface="Cambria" pitchFamily="34" charset="-120"/>
-              </a:rPr>
-              <a:t>¿Qué perfil ofensivo tiene cada liga?</a:t>
-            </a:r>
-            <a:endParaRPr lang="en-US" sz="1100" dirty="0"/>
-          </a:p>
-        </p:txBody>
-      </p:sp>
-      <p:sp>
-        <p:nvSpPr>
-          <p:cNvPr id="27" name="Text 25"/>
-          <p:cNvSpPr/>
-          <p:nvPr/>
-        </p:nvSpPr>
-        <p:spPr>
-          <a:xfrm>
-            <a:off x="5093208" y="3163824"/>
-            <a:ext cx="3749040" cy="1207008"/>
-          </a:xfrm>
-          <a:prstGeom prst="rect">
-            <a:avLst/>
-          </a:prstGeom>
-          <a:noFill/>
-          <a:ln/>
-        </p:spPr>
-        <p:txBody>
-          <a:bodyPr wrap="square" rtlCol="0" anchor="ctr"/>
-          <a:lstStyle/>
-          <a:p>
-            <a:pPr marL="0" indent="0">
-              <a:buNone/>
-            </a:pPr>
-            <a:r>
-              <a:rPr lang="en-US" sz="1100" dirty="0">
-                <a:solidFill>
-                  <a:srgbClr val="1A1A2E"/>
-                </a:solidFill>
-                <a:latin typeface="Calibri" pitchFamily="34" charset="0"/>
-                <a:ea typeface="Calibri" pitchFamily="34" charset="-122"/>
-                <a:cs typeface="Calibri" pitchFamily="34" charset="-120"/>
-              </a:rPr>
-              <a:t>Cruzando Comp_encoded con el cluster se puede detectar si ligas como la Bundesliga concentran más jugadores de C2 ofensivo.</a:t>
-            </a:r>
-            <a:endParaRPr lang="en-US" sz="1100" dirty="0"/>
+                  <a:srgbClr val="FF0000"/>
+                </a:solidFill>
+                <a:latin typeface="Cambria" panose="02040503050406030204" pitchFamily="18" charset="0"/>
+                <a:ea typeface="Cambria" panose="02040503050406030204" pitchFamily="18" charset="0"/>
+              </a:rPr>
+              <a:t>K-Means Python 3D (MP, </a:t>
+            </a:r>
+            <a:r>
+              <a:rPr lang="en-US" sz="1300" b="1" dirty="0" err="1">
+                <a:solidFill>
+                  <a:srgbClr val="FF0000"/>
+                </a:solidFill>
+                <a:latin typeface="Cambria" panose="02040503050406030204" pitchFamily="18" charset="0"/>
+                <a:ea typeface="Cambria" panose="02040503050406030204" pitchFamily="18" charset="0"/>
+              </a:rPr>
+              <a:t>Gls</a:t>
+            </a:r>
+            <a:r>
+              <a:rPr lang="en-US" sz="1300" b="1" dirty="0">
+                <a:solidFill>
+                  <a:srgbClr val="FF0000"/>
+                </a:solidFill>
+                <a:latin typeface="Cambria" panose="02040503050406030204" pitchFamily="18" charset="0"/>
+                <a:ea typeface="Cambria" panose="02040503050406030204" pitchFamily="18" charset="0"/>
+              </a:rPr>
+              <a:t>, </a:t>
+            </a:r>
+            <a:r>
+              <a:rPr lang="en-US" sz="1300" b="1" dirty="0" err="1">
+                <a:solidFill>
+                  <a:srgbClr val="FF0000"/>
+                </a:solidFill>
+                <a:latin typeface="Cambria" panose="02040503050406030204" pitchFamily="18" charset="0"/>
+                <a:ea typeface="Cambria" panose="02040503050406030204" pitchFamily="18" charset="0"/>
+              </a:rPr>
+              <a:t>Ast</a:t>
+            </a:r>
+            <a:r>
+              <a:rPr lang="en-US" sz="1300" b="1" dirty="0">
+                <a:solidFill>
+                  <a:srgbClr val="FF0000"/>
+                </a:solidFill>
+                <a:latin typeface="Cambria" panose="02040503050406030204" pitchFamily="18" charset="0"/>
+                <a:ea typeface="Cambria" panose="02040503050406030204" pitchFamily="18" charset="0"/>
+              </a:rPr>
+              <a:t>) → </a:t>
+            </a:r>
+            <a:r>
+              <a:rPr lang="es-CO" sz="1300" b="1" dirty="0">
+                <a:solidFill>
+                  <a:srgbClr val="FF0000"/>
+                </a:solidFill>
+                <a:latin typeface="Cambria" panose="02040503050406030204" pitchFamily="18" charset="0"/>
+                <a:ea typeface="Cambria" panose="02040503050406030204" pitchFamily="18" charset="0"/>
+              </a:rPr>
+              <a:t>Verde, Amarillo, Morado.</a:t>
+            </a:r>
+            <a:endParaRPr lang="en-US" sz="1300" b="1" dirty="0">
+              <a:solidFill>
+                <a:srgbClr val="FF0000"/>
+              </a:solidFill>
+              <a:latin typeface="Cambria" panose="02040503050406030204" pitchFamily="18" charset="0"/>
+              <a:ea typeface="Cambria" panose="02040503050406030204" pitchFamily="18" charset="0"/>
+            </a:endParaRPr>
           </a:p>
         </p:txBody>
       </p:sp>
@@ -2880,7 +3051,112 @@
           </a:p>
         </p:txBody>
       </p:sp>
+      <p:sp>
+        <p:nvSpPr>
+          <p:cNvPr id="13" name="Rectangle 4">
+            <a:extLst>
+              <a:ext uri="{FF2B5EF4-FFF2-40B4-BE49-F238E27FC236}">
+                <a16:creationId xmlns:a16="http://schemas.microsoft.com/office/drawing/2014/main" id="{D5A7B428-1BE7-863E-F495-637714593A11}"/>
+              </a:ext>
+            </a:extLst>
+          </p:cNvPr>
+          <p:cNvSpPr>
+            <a:spLocks noChangeArrowheads="1"/>
+          </p:cNvSpPr>
+          <p:nvPr/>
+        </p:nvSpPr>
+        <p:spPr bwMode="auto">
+          <a:xfrm>
+            <a:off x="790605" y="2523642"/>
+            <a:ext cx="7924330" cy="661720"/>
+          </a:xfrm>
+          <a:prstGeom prst="rect">
+            <a:avLst/>
+          </a:prstGeom>
+          <a:noFill/>
+          <a:ln>
+            <a:noFill/>
+          </a:ln>
+          <a:effectLst/>
+          <a:extLst>
+            <a:ext uri="{909E8E84-426E-40DD-AFC4-6F175D3DCCD1}">
+              <a14:hiddenFill xmlns:a14="http://schemas.microsoft.com/office/drawing/2010/main">
+                <a:solidFill>
+                  <a:schemeClr val="accent1"/>
+                </a:solidFill>
+              </a14:hiddenFill>
+            </a:ext>
+            <a:ext uri="{91240B29-F687-4F45-9708-019B960494DF}">
+              <a14:hiddenLine xmlns:a14="http://schemas.microsoft.com/office/drawing/2010/main" w="9525">
+                <a:solidFill>
+                  <a:schemeClr val="tx1"/>
+                </a:solidFill>
+                <a:miter lim="800000"/>
+                <a:headEnd/>
+                <a:tailEnd/>
+              </a14:hiddenLine>
+            </a:ext>
+            <a:ext uri="{AF507438-7753-43E0-B8FC-AC1667EBCBE1}">
+              <a14:hiddenEffects xmlns:a14="http://schemas.microsoft.com/office/drawing/2010/main">
+                <a:effectLst>
+                  <a:outerShdw dist="35921" dir="2700000" algn="ctr" rotWithShape="0">
+                    <a:schemeClr val="bg2"/>
+                  </a:outerShdw>
+                </a:effectLst>
+              </a14:hiddenEffects>
+            </a:ext>
+          </a:extLst>
+        </p:spPr>
+        <p:txBody>
+          <a:bodyPr vert="horz" wrap="square" lIns="91440" tIns="45720" rIns="91440" bIns="45720" numCol="1" anchor="ctr" anchorCtr="0" compatLnSpc="1">
+            <a:prstTxWarp prst="textNoShape">
+              <a:avLst/>
+            </a:prstTxWarp>
+            <a:spAutoFit/>
+          </a:bodyPr>
+          <a:lstStyle/>
+          <a:p>
+            <a:pPr marL="0" marR="0" lvl="0" indent="0" algn="just" defTabSz="914400" rtl="0" eaLnBrk="0" fontAlgn="base" latinLnBrk="0" hangingPunct="0">
+              <a:lnSpc>
+                <a:spcPct val="100000"/>
+              </a:lnSpc>
+              <a:spcBef>
+                <a:spcPct val="0"/>
+              </a:spcBef>
+              <a:spcAft>
+                <a:spcPct val="0"/>
+              </a:spcAft>
+              <a:buClrTx/>
+              <a:buSzTx/>
+              <a:buFontTx/>
+              <a:buNone/>
+              <a:tabLst/>
+            </a:pPr>
+            <a:r>
+              <a:rPr lang="es-CO" altLang="es-CO" sz="1200" dirty="0"/>
+              <a:t>La gráfica muestra que el salto de amarillo a morado ocurre aproximadamente con al menos 3-5 goles o asistencias combinadas. Cruzar ese umbral con la variable </a:t>
+            </a:r>
+            <a:r>
+              <a:rPr lang="es-CO" altLang="es-CO" sz="1200" b="1" dirty="0" err="1"/>
+              <a:t>Comp_encoded</a:t>
+            </a:r>
+            <a:r>
+              <a:rPr lang="es-CO" altLang="es-CO" sz="1200" b="1" dirty="0"/>
+              <a:t> </a:t>
+            </a:r>
+            <a:r>
+              <a:rPr lang="es-CO" altLang="es-CO" sz="1200" dirty="0"/>
+              <a:t>permitiría a un scout saber si un jugador "amarillo" en la Bundesliga equivale a un "morado" en la Ligue 1 u otra liga. </a:t>
+            </a:r>
+          </a:p>
+        </p:txBody>
+      </p:sp>
     </p:spTree>
+    <p:extLst>
+      <p:ext uri="{BB962C8B-B14F-4D97-AF65-F5344CB8AC3E}">
+        <p14:creationId xmlns:p14="http://schemas.microsoft.com/office/powerpoint/2010/main" val="1201637683"/>
+      </p:ext>
+    </p:extLst>
   </p:cSld>
   <p:clrMapOvr>
     <a:masterClrMapping/>
@@ -2888,7 +3164,7 @@
 </p:sld>
 </file>
 
-<file path=ppt/slides/slide11.xml><?xml version="1.0" encoding="utf-8"?>
+<file path=ppt/slides/slide12.xml><?xml version="1.0" encoding="utf-8"?>
 <p:sld xmlns:a="http://schemas.openxmlformats.org/drawingml/2006/main" xmlns:r="http://schemas.openxmlformats.org/officeDocument/2006/relationships" xmlns:p="http://schemas.openxmlformats.org/presentationml/2006/main">
   <p:cSld name="Slide 10">
     <p:bg>
@@ -3306,7 +3582,7 @@
           <a:bodyPr wrap="square" rtlCol="0" anchor="ctr"/>
           <a:lstStyle/>
           <a:p>
-            <a:pPr marL="0" indent="0">
+            <a:pPr marL="0" indent="0" algn="just">
               <a:buNone/>
             </a:pPr>
             <a:r>
@@ -3318,7 +3594,381 @@
                 <a:ea typeface="Calibri" pitchFamily="34" charset="-122"/>
                 <a:cs typeface="Calibri" pitchFamily="34" charset="-120"/>
               </a:rPr>
-              <a:t>C1: jugadores periféricos/en desarrollo. C2: jugadores con participación activa y relevancia competitiva en sus equipos.</a:t>
+              <a:t>Al </a:t>
+            </a:r>
+            <a:r>
+              <a:rPr lang="en-US" sz="1100" dirty="0" err="1">
+                <a:solidFill>
+                  <a:srgbClr val="FAF0E6"/>
+                </a:solidFill>
+                <a:latin typeface="Calibri" pitchFamily="34" charset="0"/>
+                <a:ea typeface="Calibri" pitchFamily="34" charset="-122"/>
+                <a:cs typeface="Calibri" pitchFamily="34" charset="-120"/>
+              </a:rPr>
+              <a:t>implementar</a:t>
+            </a:r>
+            <a:r>
+              <a:rPr lang="en-US" sz="1100" dirty="0">
+                <a:solidFill>
+                  <a:srgbClr val="FAF0E6"/>
+                </a:solidFill>
+                <a:latin typeface="Calibri" pitchFamily="34" charset="0"/>
+                <a:ea typeface="Calibri" pitchFamily="34" charset="-122"/>
+                <a:cs typeface="Calibri" pitchFamily="34" charset="-120"/>
+              </a:rPr>
+              <a:t> </a:t>
+            </a:r>
+            <a:r>
+              <a:rPr lang="en-US" sz="1100" dirty="0" err="1">
+                <a:solidFill>
+                  <a:srgbClr val="FAF0E6"/>
+                </a:solidFill>
+                <a:latin typeface="Calibri" pitchFamily="34" charset="0"/>
+                <a:ea typeface="Calibri" pitchFamily="34" charset="-122"/>
+                <a:cs typeface="Calibri" pitchFamily="34" charset="-120"/>
+              </a:rPr>
+              <a:t>los</a:t>
+            </a:r>
+            <a:r>
+              <a:rPr lang="en-US" sz="1100" dirty="0">
+                <a:solidFill>
+                  <a:srgbClr val="FAF0E6"/>
+                </a:solidFill>
+                <a:latin typeface="Calibri" pitchFamily="34" charset="0"/>
+                <a:ea typeface="Calibri" pitchFamily="34" charset="-122"/>
+                <a:cs typeface="Calibri" pitchFamily="34" charset="-120"/>
+              </a:rPr>
+              <a:t> dos </a:t>
+            </a:r>
+            <a:r>
+              <a:rPr lang="en-US" sz="1100" dirty="0" err="1">
+                <a:solidFill>
+                  <a:srgbClr val="FAF0E6"/>
+                </a:solidFill>
+                <a:latin typeface="Calibri" pitchFamily="34" charset="0"/>
+                <a:ea typeface="Calibri" pitchFamily="34" charset="-122"/>
+                <a:cs typeface="Calibri" pitchFamily="34" charset="-120"/>
+              </a:rPr>
+              <a:t>algoritmos</a:t>
+            </a:r>
+            <a:r>
+              <a:rPr lang="en-US" sz="1100" dirty="0">
+                <a:solidFill>
+                  <a:srgbClr val="FAF0E6"/>
+                </a:solidFill>
+                <a:latin typeface="Calibri" pitchFamily="34" charset="0"/>
+                <a:ea typeface="Calibri" pitchFamily="34" charset="-122"/>
+                <a:cs typeface="Calibri" pitchFamily="34" charset="-120"/>
+              </a:rPr>
+              <a:t>, </a:t>
+            </a:r>
+            <a:r>
+              <a:rPr lang="en-US" sz="1100" dirty="0" err="1">
+                <a:solidFill>
+                  <a:srgbClr val="FAF0E6"/>
+                </a:solidFill>
+                <a:latin typeface="Calibri" pitchFamily="34" charset="0"/>
+                <a:ea typeface="Calibri" pitchFamily="34" charset="-122"/>
+                <a:cs typeface="Calibri" pitchFamily="34" charset="-120"/>
+              </a:rPr>
+              <a:t>cada</a:t>
+            </a:r>
+            <a:r>
+              <a:rPr lang="en-US" sz="1100" dirty="0">
+                <a:solidFill>
+                  <a:srgbClr val="FAF0E6"/>
+                </a:solidFill>
+                <a:latin typeface="Calibri" pitchFamily="34" charset="0"/>
+                <a:ea typeface="Calibri" pitchFamily="34" charset="-122"/>
+                <a:cs typeface="Calibri" pitchFamily="34" charset="-120"/>
+              </a:rPr>
+              <a:t> cluster </a:t>
+            </a:r>
+            <a:r>
+              <a:rPr lang="en-US" sz="1100" dirty="0" err="1">
+                <a:solidFill>
+                  <a:srgbClr val="FAF0E6"/>
+                </a:solidFill>
+                <a:latin typeface="Calibri" pitchFamily="34" charset="0"/>
+                <a:ea typeface="Calibri" pitchFamily="34" charset="-122"/>
+                <a:cs typeface="Calibri" pitchFamily="34" charset="-120"/>
+              </a:rPr>
+              <a:t>segmentaba</a:t>
+            </a:r>
+            <a:r>
+              <a:rPr lang="en-US" sz="1100" dirty="0">
+                <a:solidFill>
+                  <a:srgbClr val="FAF0E6"/>
+                </a:solidFill>
+                <a:latin typeface="Calibri" pitchFamily="34" charset="0"/>
+                <a:ea typeface="Calibri" pitchFamily="34" charset="-122"/>
+                <a:cs typeface="Calibri" pitchFamily="34" charset="-120"/>
+              </a:rPr>
+              <a:t> </a:t>
+            </a:r>
+            <a:r>
+              <a:rPr lang="en-US" sz="1100" dirty="0" err="1">
+                <a:solidFill>
+                  <a:srgbClr val="FAF0E6"/>
+                </a:solidFill>
+                <a:latin typeface="Calibri" pitchFamily="34" charset="0"/>
+                <a:ea typeface="Calibri" pitchFamily="34" charset="-122"/>
+                <a:cs typeface="Calibri" pitchFamily="34" charset="-120"/>
+              </a:rPr>
+              <a:t>claramente</a:t>
+            </a:r>
+            <a:r>
+              <a:rPr lang="en-US" sz="1100" dirty="0">
+                <a:solidFill>
+                  <a:srgbClr val="FAF0E6"/>
+                </a:solidFill>
+                <a:latin typeface="Calibri" pitchFamily="34" charset="0"/>
+                <a:ea typeface="Calibri" pitchFamily="34" charset="-122"/>
+                <a:cs typeface="Calibri" pitchFamily="34" charset="-120"/>
+              </a:rPr>
+              <a:t> </a:t>
+            </a:r>
+            <a:r>
+              <a:rPr lang="en-US" sz="1100" dirty="0" err="1">
+                <a:solidFill>
+                  <a:srgbClr val="FAF0E6"/>
+                </a:solidFill>
+                <a:latin typeface="Calibri" pitchFamily="34" charset="0"/>
+                <a:ea typeface="Calibri" pitchFamily="34" charset="-122"/>
+                <a:cs typeface="Calibri" pitchFamily="34" charset="-120"/>
+              </a:rPr>
+              <a:t>los</a:t>
+            </a:r>
+            <a:r>
+              <a:rPr lang="en-US" sz="1100" dirty="0">
+                <a:solidFill>
+                  <a:srgbClr val="FAF0E6"/>
+                </a:solidFill>
+                <a:latin typeface="Calibri" pitchFamily="34" charset="0"/>
+                <a:ea typeface="Calibri" pitchFamily="34" charset="-122"/>
+                <a:cs typeface="Calibri" pitchFamily="34" charset="-120"/>
+              </a:rPr>
+              <a:t> </a:t>
+            </a:r>
+            <a:r>
+              <a:rPr lang="en-US" sz="1100" dirty="0" err="1">
+                <a:solidFill>
+                  <a:srgbClr val="FAF0E6"/>
+                </a:solidFill>
+                <a:latin typeface="Calibri" pitchFamily="34" charset="0"/>
+                <a:ea typeface="Calibri" pitchFamily="34" charset="-122"/>
+                <a:cs typeface="Calibri" pitchFamily="34" charset="-120"/>
+              </a:rPr>
+              <a:t>perfiles</a:t>
+            </a:r>
+            <a:r>
+              <a:rPr lang="en-US" sz="1100" dirty="0">
+                <a:solidFill>
+                  <a:srgbClr val="FAF0E6"/>
+                </a:solidFill>
+                <a:latin typeface="Calibri" pitchFamily="34" charset="0"/>
+                <a:ea typeface="Calibri" pitchFamily="34" charset="-122"/>
+                <a:cs typeface="Calibri" pitchFamily="34" charset="-120"/>
+              </a:rPr>
+              <a:t> de </a:t>
+            </a:r>
+            <a:r>
+              <a:rPr lang="en-US" sz="1100" dirty="0" err="1">
+                <a:solidFill>
+                  <a:srgbClr val="FAF0E6"/>
+                </a:solidFill>
+                <a:latin typeface="Calibri" pitchFamily="34" charset="0"/>
+                <a:ea typeface="Calibri" pitchFamily="34" charset="-122"/>
+                <a:cs typeface="Calibri" pitchFamily="34" charset="-120"/>
+              </a:rPr>
+              <a:t>los</a:t>
+            </a:r>
+            <a:r>
+              <a:rPr lang="en-US" sz="1100" dirty="0">
+                <a:solidFill>
+                  <a:srgbClr val="FAF0E6"/>
+                </a:solidFill>
+                <a:latin typeface="Calibri" pitchFamily="34" charset="0"/>
+                <a:ea typeface="Calibri" pitchFamily="34" charset="-122"/>
+                <a:cs typeface="Calibri" pitchFamily="34" charset="-120"/>
+              </a:rPr>
+              <a:t> </a:t>
+            </a:r>
+            <a:r>
+              <a:rPr lang="en-US" sz="1100" dirty="0" err="1">
+                <a:solidFill>
+                  <a:srgbClr val="FAF0E6"/>
+                </a:solidFill>
+                <a:latin typeface="Calibri" pitchFamily="34" charset="0"/>
+                <a:ea typeface="Calibri" pitchFamily="34" charset="-122"/>
+                <a:cs typeface="Calibri" pitchFamily="34" charset="-120"/>
+              </a:rPr>
+              <a:t>jugadores</a:t>
+            </a:r>
+            <a:r>
+              <a:rPr lang="en-US" sz="1100" dirty="0">
+                <a:solidFill>
+                  <a:srgbClr val="FAF0E6"/>
+                </a:solidFill>
+                <a:latin typeface="Calibri" pitchFamily="34" charset="0"/>
+                <a:ea typeface="Calibri" pitchFamily="34" charset="-122"/>
+                <a:cs typeface="Calibri" pitchFamily="34" charset="-120"/>
+              </a:rPr>
+              <a:t> de </a:t>
+            </a:r>
+            <a:r>
+              <a:rPr lang="en-US" sz="1100" dirty="0" err="1">
+                <a:solidFill>
+                  <a:srgbClr val="FAF0E6"/>
+                </a:solidFill>
+                <a:latin typeface="Calibri" pitchFamily="34" charset="0"/>
+                <a:ea typeface="Calibri" pitchFamily="34" charset="-122"/>
+                <a:cs typeface="Calibri" pitchFamily="34" charset="-120"/>
+              </a:rPr>
+              <a:t>acuerdo</a:t>
+            </a:r>
+            <a:r>
+              <a:rPr lang="en-US" sz="1100" dirty="0">
+                <a:solidFill>
+                  <a:srgbClr val="FAF0E6"/>
+                </a:solidFill>
+                <a:latin typeface="Calibri" pitchFamily="34" charset="0"/>
+                <a:ea typeface="Calibri" pitchFamily="34" charset="-122"/>
+                <a:cs typeface="Calibri" pitchFamily="34" charset="-120"/>
+              </a:rPr>
+              <a:t> a </a:t>
+            </a:r>
+            <a:r>
+              <a:rPr lang="en-US" sz="1100" dirty="0" err="1">
+                <a:solidFill>
+                  <a:srgbClr val="FAF0E6"/>
+                </a:solidFill>
+                <a:latin typeface="Calibri" pitchFamily="34" charset="0"/>
+                <a:ea typeface="Calibri" pitchFamily="34" charset="-122"/>
+                <a:cs typeface="Calibri" pitchFamily="34" charset="-120"/>
+              </a:rPr>
+              <a:t>los</a:t>
+            </a:r>
+            <a:r>
+              <a:rPr lang="en-US" sz="1100" dirty="0">
+                <a:solidFill>
+                  <a:srgbClr val="FAF0E6"/>
+                </a:solidFill>
+                <a:latin typeface="Calibri" pitchFamily="34" charset="0"/>
+                <a:ea typeface="Calibri" pitchFamily="34" charset="-122"/>
+                <a:cs typeface="Calibri" pitchFamily="34" charset="-120"/>
+              </a:rPr>
+              <a:t> </a:t>
+            </a:r>
+            <a:r>
+              <a:rPr lang="en-US" sz="1100" dirty="0" err="1">
+                <a:solidFill>
+                  <a:srgbClr val="FAF0E6"/>
+                </a:solidFill>
+                <a:latin typeface="Calibri" pitchFamily="34" charset="0"/>
+                <a:ea typeface="Calibri" pitchFamily="34" charset="-122"/>
+                <a:cs typeface="Calibri" pitchFamily="34" charset="-120"/>
+              </a:rPr>
+              <a:t>atributos</a:t>
+            </a:r>
+            <a:r>
+              <a:rPr lang="en-US" sz="1100" dirty="0">
+                <a:solidFill>
+                  <a:srgbClr val="FAF0E6"/>
+                </a:solidFill>
+                <a:latin typeface="Calibri" pitchFamily="34" charset="0"/>
+                <a:ea typeface="Calibri" pitchFamily="34" charset="-122"/>
+                <a:cs typeface="Calibri" pitchFamily="34" charset="-120"/>
+              </a:rPr>
+              <a:t> </a:t>
+            </a:r>
+            <a:r>
+              <a:rPr lang="en-US" sz="1100" dirty="0" err="1">
+                <a:solidFill>
+                  <a:srgbClr val="FAF0E6"/>
+                </a:solidFill>
+                <a:latin typeface="Calibri" pitchFamily="34" charset="0"/>
+                <a:ea typeface="Calibri" pitchFamily="34" charset="-122"/>
+                <a:cs typeface="Calibri" pitchFamily="34" charset="-120"/>
+              </a:rPr>
+              <a:t>seleccionados</a:t>
+            </a:r>
+            <a:r>
+              <a:rPr lang="en-US" sz="1100" dirty="0">
+                <a:solidFill>
+                  <a:srgbClr val="FAF0E6"/>
+                </a:solidFill>
+                <a:latin typeface="Calibri" pitchFamily="34" charset="0"/>
+                <a:ea typeface="Calibri" pitchFamily="34" charset="-122"/>
+                <a:cs typeface="Calibri" pitchFamily="34" charset="-120"/>
+              </a:rPr>
+              <a:t> </a:t>
+            </a:r>
+            <a:r>
+              <a:rPr lang="en-US" sz="1100" dirty="0" err="1">
+                <a:solidFill>
+                  <a:srgbClr val="FAF0E6"/>
+                </a:solidFill>
+                <a:latin typeface="Calibri" pitchFamily="34" charset="0"/>
+                <a:ea typeface="Calibri" pitchFamily="34" charset="-122"/>
+                <a:cs typeface="Calibri" pitchFamily="34" charset="-120"/>
+              </a:rPr>
+              <a:t>como</a:t>
+            </a:r>
+            <a:r>
+              <a:rPr lang="en-US" sz="1100" dirty="0">
+                <a:solidFill>
+                  <a:srgbClr val="FAF0E6"/>
+                </a:solidFill>
+                <a:latin typeface="Calibri" pitchFamily="34" charset="0"/>
+                <a:ea typeface="Calibri" pitchFamily="34" charset="-122"/>
+                <a:cs typeface="Calibri" pitchFamily="34" charset="-120"/>
+              </a:rPr>
+              <a:t> </a:t>
+            </a:r>
+            <a:r>
+              <a:rPr lang="en-US" sz="1100" dirty="0" err="1">
+                <a:solidFill>
+                  <a:srgbClr val="FAF0E6"/>
+                </a:solidFill>
+                <a:latin typeface="Calibri" pitchFamily="34" charset="0"/>
+                <a:ea typeface="Calibri" pitchFamily="34" charset="-122"/>
+                <a:cs typeface="Calibri" pitchFamily="34" charset="-120"/>
+              </a:rPr>
+              <a:t>criterio</a:t>
+            </a:r>
+            <a:r>
+              <a:rPr lang="en-US" sz="1100" dirty="0">
+                <a:solidFill>
+                  <a:srgbClr val="FAF0E6"/>
+                </a:solidFill>
+                <a:latin typeface="Calibri" pitchFamily="34" charset="0"/>
+                <a:ea typeface="Calibri" pitchFamily="34" charset="-122"/>
+                <a:cs typeface="Calibri" pitchFamily="34" charset="-120"/>
+              </a:rPr>
+              <a:t> para </a:t>
+            </a:r>
+            <a:r>
+              <a:rPr lang="en-US" sz="1100" dirty="0" err="1">
+                <a:solidFill>
+                  <a:srgbClr val="FAF0E6"/>
+                </a:solidFill>
+                <a:latin typeface="Calibri" pitchFamily="34" charset="0"/>
+                <a:ea typeface="Calibri" pitchFamily="34" charset="-122"/>
+                <a:cs typeface="Calibri" pitchFamily="34" charset="-120"/>
+              </a:rPr>
+              <a:t>ello</a:t>
+            </a:r>
+            <a:r>
+              <a:rPr lang="en-US" sz="1100" dirty="0">
+                <a:solidFill>
+                  <a:srgbClr val="FAF0E6"/>
+                </a:solidFill>
+                <a:latin typeface="Calibri" pitchFamily="34" charset="0"/>
+                <a:ea typeface="Calibri" pitchFamily="34" charset="-122"/>
+                <a:cs typeface="Calibri" pitchFamily="34" charset="-120"/>
+              </a:rPr>
+              <a:t>.</a:t>
             </a:r>
             <a:endParaRPr lang="en-US" sz="1100" dirty="0"/>
           </a:p>
@@ -8035,7 +8685,39 @@
                 <a:ea typeface="Tahoma" panose="020B0604030504040204" pitchFamily="34" charset="0"/>
                 <a:cs typeface="Tahoma" panose="020B0604030504040204" pitchFamily="34" charset="0"/>
               </a:rPr>
-              <a:t>Scatter Plot: Minutos vs Goles — K-Means (Orange)</a:t>
+              <a:t>Scatter Plot: Minutos vs </a:t>
+            </a:r>
+            <a:r>
+              <a:rPr lang="en-US" sz="1200" b="1" i="1" dirty="0" err="1">
+                <a:latin typeface="Tahoma" panose="020B0604030504040204" pitchFamily="34" charset="0"/>
+                <a:ea typeface="Tahoma" panose="020B0604030504040204" pitchFamily="34" charset="0"/>
+                <a:cs typeface="Tahoma" panose="020B0604030504040204" pitchFamily="34" charset="0"/>
+              </a:rPr>
+              <a:t>Goles</a:t>
+            </a:r>
+            <a:r>
+              <a:rPr lang="en-US" sz="1200" b="1" i="1" dirty="0">
+                <a:latin typeface="Tahoma" panose="020B0604030504040204" pitchFamily="34" charset="0"/>
+                <a:ea typeface="Tahoma" panose="020B0604030504040204" pitchFamily="34" charset="0"/>
+                <a:cs typeface="Tahoma" panose="020B0604030504040204" pitchFamily="34" charset="0"/>
+              </a:rPr>
+              <a:t> </a:t>
+            </a:r>
+            <a:r>
+              <a:rPr lang="en-US" sz="1200" b="1" dirty="0">
+                <a:latin typeface="Cambria" panose="02040503050406030204" pitchFamily="18" charset="0"/>
+                <a:ea typeface="Cambria" panose="02040503050406030204" pitchFamily="18" charset="0"/>
+                <a:cs typeface="Calibri" pitchFamily="34" charset="-120"/>
+              </a:rPr>
+              <a:t>→</a:t>
+            </a:r>
+            <a:r>
+              <a:rPr lang="en-US" sz="1200" b="1" i="1" dirty="0">
+                <a:latin typeface="Tahoma" panose="020B0604030504040204" pitchFamily="34" charset="0"/>
+                <a:ea typeface="Tahoma" panose="020B0604030504040204" pitchFamily="34" charset="0"/>
+                <a:cs typeface="Tahoma" panose="020B0604030504040204" pitchFamily="34" charset="0"/>
+              </a:rPr>
+              <a:t> K-Means (Orange)</a:t>
             </a:r>
             <a:endParaRPr lang="en-US" sz="1200" b="1" dirty="0">
               <a:latin typeface="Tahoma" panose="020B0604030504040204" pitchFamily="34" charset="0"/>
@@ -9378,8 +10060,8 @@
         </p:nvSpPr>
         <p:spPr>
           <a:xfrm>
-            <a:off x="274320" y="3977640"/>
-            <a:ext cx="8595360" cy="658368"/>
+            <a:off x="461420" y="1761186"/>
+            <a:ext cx="3509890" cy="1258444"/>
           </a:xfrm>
           <a:prstGeom prst="rect">
             <a:avLst/>
@@ -9401,6 +10083,13 @@
             </a:outerShdw>
           </a:effectLst>
         </p:spPr>
+        <p:txBody>
+          <a:bodyPr/>
+          <a:lstStyle/>
+          <a:p>
+            <a:endParaRPr lang="es-CO" dirty="0"/>
+          </a:p>
+        </p:txBody>
       </p:sp>
       <p:sp>
         <p:nvSpPr>
@@ -9410,8 +10099,8 @@
         </p:nvSpPr>
         <p:spPr>
           <a:xfrm>
-            <a:off x="274320" y="3977640"/>
-            <a:ext cx="256032" cy="658368"/>
+            <a:off x="461420" y="1766110"/>
+            <a:ext cx="256032" cy="1263368"/>
           </a:xfrm>
           <a:prstGeom prst="rect">
             <a:avLst/>
@@ -9426,6 +10115,14 @@
             <a:prstDash val="solid"/>
           </a:ln>
         </p:spPr>
+        <p:txBody>
+          <a:bodyPr/>
+          <a:lstStyle/>
+          <a:p>
+            <a:pPr algn="ctr"/>
+            <a:endParaRPr lang="es-CO" dirty="0"/>
+          </a:p>
+        </p:txBody>
       </p:sp>
       <p:sp>
         <p:nvSpPr>
@@ -9435,8 +10132,8 @@
         </p:nvSpPr>
         <p:spPr>
           <a:xfrm>
-            <a:off x="621792" y="4023360"/>
-            <a:ext cx="8183880" cy="566928"/>
+            <a:off x="717452" y="1747470"/>
+            <a:ext cx="3253858" cy="1263368"/>
           </a:xfrm>
           <a:prstGeom prst="rect">
             <a:avLst/>
@@ -9448,10 +10145,65 @@
           <a:bodyPr wrap="square" rtlCol="0" anchor="ctr"/>
           <a:lstStyle/>
           <a:p>
-            <a:pPr marL="0" indent="0">
+            <a:pPr marL="0" indent="0" algn="just">
               <a:buNone/>
             </a:pPr>
             <a:r>
+              <a:rPr lang="en-US" sz="1050" dirty="0">
+                <a:solidFill>
+                  <a:srgbClr val="1A1A2E"/>
+                </a:solidFill>
+                <a:latin typeface="Calibri" pitchFamily="34" charset="0"/>
+                <a:ea typeface="Calibri" pitchFamily="34" charset="-122"/>
+                <a:cs typeface="Calibri" pitchFamily="34" charset="-120"/>
+              </a:rPr>
+              <a:t>Con la </a:t>
+            </a:r>
+            <a:r>
+              <a:rPr lang="en-US" sz="1050" dirty="0" err="1">
+                <a:solidFill>
+                  <a:srgbClr val="1A1A2E"/>
+                </a:solidFill>
+                <a:latin typeface="Calibri" pitchFamily="34" charset="0"/>
+                <a:ea typeface="Calibri" pitchFamily="34" charset="-122"/>
+                <a:cs typeface="Calibri" pitchFamily="34" charset="-120"/>
+              </a:rPr>
+              <a:t>ayuda</a:t>
+            </a:r>
+            <a:r>
+              <a:rPr lang="en-US" sz="1050" dirty="0">
+                <a:solidFill>
+                  <a:srgbClr val="1A1A2E"/>
+                </a:solidFill>
+                <a:latin typeface="Calibri" pitchFamily="34" charset="0"/>
+                <a:ea typeface="Calibri" pitchFamily="34" charset="-122"/>
+                <a:cs typeface="Calibri" pitchFamily="34" charset="-120"/>
+              </a:rPr>
+              <a:t> de la </a:t>
+            </a:r>
+            <a:r>
+              <a:rPr lang="en-US" sz="1050" dirty="0" err="1">
+                <a:solidFill>
+                  <a:srgbClr val="1A1A2E"/>
+                </a:solidFill>
+                <a:latin typeface="Calibri" pitchFamily="34" charset="0"/>
+                <a:ea typeface="Calibri" pitchFamily="34" charset="-122"/>
+                <a:cs typeface="Calibri" pitchFamily="34" charset="-120"/>
+              </a:rPr>
+              <a:t>librería</a:t>
+            </a:r>
+            <a:r>
+              <a:rPr lang="en-US" sz="1050" dirty="0">
+                <a:solidFill>
+                  <a:srgbClr val="1A1A2E"/>
+                </a:solidFill>
+                <a:latin typeface="Calibri" pitchFamily="34" charset="0"/>
+                <a:ea typeface="Calibri" pitchFamily="34" charset="-122"/>
+                <a:cs typeface="Calibri" pitchFamily="34" charset="-120"/>
+              </a:rPr>
+              <a:t> </a:t>
+            </a:r>
+            <a:r>
               <a:rPr lang="en-US" sz="1050" b="1" dirty="0">
                 <a:solidFill>
                   <a:srgbClr val="1A1A2E"/>
@@ -9460,7 +10212,7 @@
                 <a:ea typeface="Calibri" pitchFamily="34" charset="-122"/>
                 <a:cs typeface="Calibri" pitchFamily="34" charset="-120"/>
               </a:rPr>
-              <a:t>Jerárquico: </a:t>
+              <a:t>scikit-learn, </a:t>
             </a:r>
             <a:r>
               <a:rPr lang="en-US" sz="1050" dirty="0">
@@ -9471,7 +10223,381 @@
                 <a:ea typeface="Calibri" pitchFamily="34" charset="-122"/>
                 <a:cs typeface="Calibri" pitchFamily="34" charset="-120"/>
               </a:rPr>
-              <a:t>C1 agrupa a jugadores lanzadores de penales (alta PKatt y PK), C2 al resto. Consistente con K-Means.  </a:t>
+              <a:t>se </a:t>
+            </a:r>
+            <a:r>
+              <a:rPr lang="en-US" sz="1050" dirty="0" err="1">
+                <a:solidFill>
+                  <a:srgbClr val="1A1A2E"/>
+                </a:solidFill>
+                <a:latin typeface="Calibri" pitchFamily="34" charset="0"/>
+                <a:ea typeface="Calibri" pitchFamily="34" charset="-122"/>
+                <a:cs typeface="Calibri" pitchFamily="34" charset="-120"/>
+              </a:rPr>
+              <a:t>realizó</a:t>
+            </a:r>
+            <a:r>
+              <a:rPr lang="en-US" sz="1050" dirty="0">
+                <a:solidFill>
+                  <a:srgbClr val="1A1A2E"/>
+                </a:solidFill>
+                <a:latin typeface="Calibri" pitchFamily="34" charset="0"/>
+                <a:ea typeface="Calibri" pitchFamily="34" charset="-122"/>
+                <a:cs typeface="Calibri" pitchFamily="34" charset="-120"/>
+              </a:rPr>
+              <a:t> </a:t>
+            </a:r>
+            <a:r>
+              <a:rPr lang="en-US" sz="1050" dirty="0" err="1">
+                <a:solidFill>
+                  <a:srgbClr val="1A1A2E"/>
+                </a:solidFill>
+                <a:latin typeface="Calibri" pitchFamily="34" charset="0"/>
+                <a:ea typeface="Calibri" pitchFamily="34" charset="-122"/>
+                <a:cs typeface="Calibri" pitchFamily="34" charset="-120"/>
+              </a:rPr>
+              <a:t>el</a:t>
+            </a:r>
+            <a:r>
+              <a:rPr lang="en-US" sz="1050" dirty="0">
+                <a:solidFill>
+                  <a:srgbClr val="1A1A2E"/>
+                </a:solidFill>
+                <a:latin typeface="Calibri" pitchFamily="34" charset="0"/>
+                <a:ea typeface="Calibri" pitchFamily="34" charset="-122"/>
+                <a:cs typeface="Calibri" pitchFamily="34" charset="-120"/>
+              </a:rPr>
+              <a:t> </a:t>
+            </a:r>
+            <a:r>
+              <a:rPr lang="en-US" sz="1050" dirty="0" err="1">
+                <a:solidFill>
+                  <a:srgbClr val="1A1A2E"/>
+                </a:solidFill>
+                <a:latin typeface="Calibri" pitchFamily="34" charset="0"/>
+                <a:ea typeface="Calibri" pitchFamily="34" charset="-122"/>
+                <a:cs typeface="Calibri" pitchFamily="34" charset="-120"/>
+              </a:rPr>
+              <a:t>método</a:t>
+            </a:r>
+            <a:r>
+              <a:rPr lang="en-US" sz="1050" dirty="0">
+                <a:solidFill>
+                  <a:srgbClr val="1A1A2E"/>
+                </a:solidFill>
+                <a:latin typeface="Calibri" pitchFamily="34" charset="0"/>
+                <a:ea typeface="Calibri" pitchFamily="34" charset="-122"/>
+                <a:cs typeface="Calibri" pitchFamily="34" charset="-120"/>
+              </a:rPr>
+              <a:t> del </a:t>
+            </a:r>
+            <a:r>
+              <a:rPr lang="en-US" sz="1050" dirty="0" err="1">
+                <a:solidFill>
+                  <a:srgbClr val="1A1A2E"/>
+                </a:solidFill>
+                <a:latin typeface="Calibri" pitchFamily="34" charset="0"/>
+                <a:ea typeface="Calibri" pitchFamily="34" charset="-122"/>
+                <a:cs typeface="Calibri" pitchFamily="34" charset="-120"/>
+              </a:rPr>
+              <a:t>codo</a:t>
+            </a:r>
+            <a:r>
+              <a:rPr lang="en-US" sz="1050" dirty="0">
+                <a:solidFill>
+                  <a:srgbClr val="1A1A2E"/>
+                </a:solidFill>
+                <a:latin typeface="Calibri" pitchFamily="34" charset="0"/>
+                <a:ea typeface="Calibri" pitchFamily="34" charset="-122"/>
+                <a:cs typeface="Calibri" pitchFamily="34" charset="-120"/>
+              </a:rPr>
+              <a:t> para las </a:t>
+            </a:r>
+            <a:r>
+              <a:rPr lang="en-US" sz="1050" dirty="0" err="1">
+                <a:solidFill>
+                  <a:srgbClr val="1A1A2E"/>
+                </a:solidFill>
+                <a:latin typeface="Calibri" pitchFamily="34" charset="0"/>
+                <a:ea typeface="Calibri" pitchFamily="34" charset="-122"/>
+                <a:cs typeface="Calibri" pitchFamily="34" charset="-120"/>
+              </a:rPr>
+              <a:t>tres</a:t>
+            </a:r>
+            <a:r>
+              <a:rPr lang="en-US" sz="1050" dirty="0">
+                <a:solidFill>
+                  <a:srgbClr val="1A1A2E"/>
+                </a:solidFill>
+                <a:latin typeface="Calibri" pitchFamily="34" charset="0"/>
+                <a:ea typeface="Calibri" pitchFamily="34" charset="-122"/>
+                <a:cs typeface="Calibri" pitchFamily="34" charset="-120"/>
+              </a:rPr>
+              <a:t> variables: MP (</a:t>
+            </a:r>
+            <a:r>
+              <a:rPr lang="en-US" sz="1050" dirty="0" err="1">
+                <a:solidFill>
+                  <a:srgbClr val="1A1A2E"/>
+                </a:solidFill>
+                <a:latin typeface="Calibri" pitchFamily="34" charset="0"/>
+                <a:ea typeface="Calibri" pitchFamily="34" charset="-122"/>
+                <a:cs typeface="Calibri" pitchFamily="34" charset="-120"/>
+              </a:rPr>
+              <a:t>Partidos</a:t>
+            </a:r>
+            <a:r>
+              <a:rPr lang="en-US" sz="1050" dirty="0">
+                <a:solidFill>
+                  <a:srgbClr val="1A1A2E"/>
+                </a:solidFill>
+                <a:latin typeface="Calibri" pitchFamily="34" charset="0"/>
+                <a:ea typeface="Calibri" pitchFamily="34" charset="-122"/>
+                <a:cs typeface="Calibri" pitchFamily="34" charset="-120"/>
+              </a:rPr>
+              <a:t> </a:t>
+            </a:r>
+            <a:r>
+              <a:rPr lang="en-US" sz="1050" dirty="0" err="1">
+                <a:solidFill>
+                  <a:srgbClr val="1A1A2E"/>
+                </a:solidFill>
+                <a:latin typeface="Calibri" pitchFamily="34" charset="0"/>
+                <a:ea typeface="Calibri" pitchFamily="34" charset="-122"/>
+                <a:cs typeface="Calibri" pitchFamily="34" charset="-120"/>
+              </a:rPr>
+              <a:t>jugados</a:t>
+            </a:r>
+            <a:r>
+              <a:rPr lang="en-US" sz="1050" dirty="0">
+                <a:solidFill>
+                  <a:srgbClr val="1A1A2E"/>
+                </a:solidFill>
+                <a:latin typeface="Calibri" pitchFamily="34" charset="0"/>
+                <a:ea typeface="Calibri" pitchFamily="34" charset="-122"/>
+                <a:cs typeface="Calibri" pitchFamily="34" charset="-120"/>
+              </a:rPr>
+              <a:t>), </a:t>
+            </a:r>
+            <a:r>
+              <a:rPr lang="en-US" sz="1050" dirty="0" err="1">
+                <a:solidFill>
+                  <a:srgbClr val="1A1A2E"/>
+                </a:solidFill>
+                <a:latin typeface="Calibri" pitchFamily="34" charset="0"/>
+                <a:ea typeface="Calibri" pitchFamily="34" charset="-122"/>
+                <a:cs typeface="Calibri" pitchFamily="34" charset="-120"/>
+              </a:rPr>
+              <a:t>Gls</a:t>
+            </a:r>
+            <a:r>
+              <a:rPr lang="en-US" sz="1050" dirty="0">
+                <a:solidFill>
+                  <a:srgbClr val="1A1A2E"/>
+                </a:solidFill>
+                <a:latin typeface="Calibri" pitchFamily="34" charset="0"/>
+                <a:ea typeface="Calibri" pitchFamily="34" charset="-122"/>
+                <a:cs typeface="Calibri" pitchFamily="34" charset="-120"/>
+              </a:rPr>
+              <a:t> (</a:t>
+            </a:r>
+            <a:r>
+              <a:rPr lang="en-US" sz="1050" dirty="0" err="1">
+                <a:solidFill>
+                  <a:srgbClr val="1A1A2E"/>
+                </a:solidFill>
+                <a:latin typeface="Calibri" pitchFamily="34" charset="0"/>
+                <a:ea typeface="Calibri" pitchFamily="34" charset="-122"/>
+                <a:cs typeface="Calibri" pitchFamily="34" charset="-120"/>
+              </a:rPr>
+              <a:t>Goles</a:t>
+            </a:r>
+            <a:r>
+              <a:rPr lang="en-US" sz="1050" dirty="0">
+                <a:solidFill>
+                  <a:srgbClr val="1A1A2E"/>
+                </a:solidFill>
+                <a:latin typeface="Calibri" pitchFamily="34" charset="0"/>
+                <a:ea typeface="Calibri" pitchFamily="34" charset="-122"/>
+                <a:cs typeface="Calibri" pitchFamily="34" charset="-120"/>
+              </a:rPr>
+              <a:t>) y </a:t>
+            </a:r>
+            <a:r>
+              <a:rPr lang="en-US" sz="1050" dirty="0" err="1">
+                <a:solidFill>
+                  <a:srgbClr val="1A1A2E"/>
+                </a:solidFill>
+                <a:latin typeface="Calibri" pitchFamily="34" charset="0"/>
+                <a:ea typeface="Calibri" pitchFamily="34" charset="-122"/>
+                <a:cs typeface="Calibri" pitchFamily="34" charset="-120"/>
+              </a:rPr>
+              <a:t>Ast</a:t>
+            </a:r>
+            <a:r>
+              <a:rPr lang="en-US" sz="1050" dirty="0">
+                <a:solidFill>
+                  <a:srgbClr val="1A1A2E"/>
+                </a:solidFill>
+                <a:latin typeface="Calibri" pitchFamily="34" charset="0"/>
+                <a:ea typeface="Calibri" pitchFamily="34" charset="-122"/>
+                <a:cs typeface="Calibri" pitchFamily="34" charset="-120"/>
+              </a:rPr>
+              <a:t> (</a:t>
+            </a:r>
+            <a:r>
+              <a:rPr lang="en-US" sz="1050" dirty="0" err="1">
+                <a:solidFill>
+                  <a:srgbClr val="1A1A2E"/>
+                </a:solidFill>
+                <a:latin typeface="Calibri" pitchFamily="34" charset="0"/>
+                <a:ea typeface="Calibri" pitchFamily="34" charset="-122"/>
+                <a:cs typeface="Calibri" pitchFamily="34" charset="-120"/>
+              </a:rPr>
+              <a:t>asistencias</a:t>
+            </a:r>
+            <a:r>
+              <a:rPr lang="en-US" sz="1050" dirty="0">
+                <a:solidFill>
+                  <a:srgbClr val="1A1A2E"/>
+                </a:solidFill>
+                <a:latin typeface="Calibri" pitchFamily="34" charset="0"/>
+                <a:ea typeface="Calibri" pitchFamily="34" charset="-122"/>
+                <a:cs typeface="Calibri" pitchFamily="34" charset="-120"/>
+              </a:rPr>
+              <a:t>). Lo que </a:t>
+            </a:r>
+            <a:r>
+              <a:rPr lang="en-US" sz="1050" dirty="0" err="1">
+                <a:solidFill>
+                  <a:srgbClr val="1A1A2E"/>
+                </a:solidFill>
+                <a:latin typeface="Calibri" pitchFamily="34" charset="0"/>
+                <a:ea typeface="Calibri" pitchFamily="34" charset="-122"/>
+                <a:cs typeface="Calibri" pitchFamily="34" charset="-120"/>
+              </a:rPr>
+              <a:t>dió</a:t>
+            </a:r>
+            <a:r>
+              <a:rPr lang="en-US" sz="1050" dirty="0">
+                <a:solidFill>
+                  <a:srgbClr val="1A1A2E"/>
+                </a:solidFill>
+                <a:latin typeface="Calibri" pitchFamily="34" charset="0"/>
+                <a:ea typeface="Calibri" pitchFamily="34" charset="-122"/>
+                <a:cs typeface="Calibri" pitchFamily="34" charset="-120"/>
+              </a:rPr>
+              <a:t> </a:t>
+            </a:r>
+            <a:r>
+              <a:rPr lang="en-US" sz="1050" dirty="0" err="1">
+                <a:solidFill>
+                  <a:srgbClr val="1A1A2E"/>
+                </a:solidFill>
+                <a:latin typeface="Calibri" pitchFamily="34" charset="0"/>
+                <a:ea typeface="Calibri" pitchFamily="34" charset="-122"/>
+                <a:cs typeface="Calibri" pitchFamily="34" charset="-120"/>
+              </a:rPr>
+              <a:t>como</a:t>
+            </a:r>
+            <a:r>
+              <a:rPr lang="en-US" sz="1050" dirty="0">
+                <a:solidFill>
+                  <a:srgbClr val="1A1A2E"/>
+                </a:solidFill>
+                <a:latin typeface="Calibri" pitchFamily="34" charset="0"/>
+                <a:ea typeface="Calibri" pitchFamily="34" charset="-122"/>
+                <a:cs typeface="Calibri" pitchFamily="34" charset="-120"/>
+              </a:rPr>
+              <a:t> </a:t>
+            </a:r>
+            <a:r>
+              <a:rPr lang="en-US" sz="1050" dirty="0" err="1">
+                <a:solidFill>
+                  <a:srgbClr val="1A1A2E"/>
+                </a:solidFill>
+                <a:latin typeface="Calibri" pitchFamily="34" charset="0"/>
+                <a:ea typeface="Calibri" pitchFamily="34" charset="-122"/>
+                <a:cs typeface="Calibri" pitchFamily="34" charset="-120"/>
+              </a:rPr>
+              <a:t>resultado</a:t>
+            </a:r>
+            <a:r>
+              <a:rPr lang="en-US" sz="1050" dirty="0">
+                <a:solidFill>
+                  <a:srgbClr val="1A1A2E"/>
+                </a:solidFill>
+                <a:latin typeface="Calibri" pitchFamily="34" charset="0"/>
+                <a:ea typeface="Calibri" pitchFamily="34" charset="-122"/>
+                <a:cs typeface="Calibri" pitchFamily="34" charset="-120"/>
+              </a:rPr>
+              <a:t> que </a:t>
+            </a:r>
+            <a:r>
+              <a:rPr lang="en-US" sz="1050" dirty="0" err="1">
+                <a:solidFill>
+                  <a:srgbClr val="1A1A2E"/>
+                </a:solidFill>
+                <a:latin typeface="Calibri" pitchFamily="34" charset="0"/>
+                <a:ea typeface="Calibri" pitchFamily="34" charset="-122"/>
+                <a:cs typeface="Calibri" pitchFamily="34" charset="-120"/>
+              </a:rPr>
+              <a:t>el</a:t>
+            </a:r>
+            <a:r>
+              <a:rPr lang="en-US" sz="1050" dirty="0">
+                <a:solidFill>
+                  <a:srgbClr val="1A1A2E"/>
+                </a:solidFill>
+                <a:latin typeface="Calibri" pitchFamily="34" charset="0"/>
+                <a:ea typeface="Calibri" pitchFamily="34" charset="-122"/>
+                <a:cs typeface="Calibri" pitchFamily="34" charset="-120"/>
+              </a:rPr>
+              <a:t> </a:t>
+            </a:r>
+            <a:r>
+              <a:rPr lang="en-US" sz="1050" dirty="0" err="1">
+                <a:solidFill>
+                  <a:srgbClr val="1A1A2E"/>
+                </a:solidFill>
+                <a:latin typeface="Calibri" pitchFamily="34" charset="0"/>
+                <a:ea typeface="Calibri" pitchFamily="34" charset="-122"/>
+                <a:cs typeface="Calibri" pitchFamily="34" charset="-120"/>
+              </a:rPr>
+              <a:t>número</a:t>
+            </a:r>
+            <a:r>
+              <a:rPr lang="en-US" sz="1050" dirty="0">
+                <a:solidFill>
+                  <a:srgbClr val="1A1A2E"/>
+                </a:solidFill>
+                <a:latin typeface="Calibri" pitchFamily="34" charset="0"/>
+                <a:ea typeface="Calibri" pitchFamily="34" charset="-122"/>
+                <a:cs typeface="Calibri" pitchFamily="34" charset="-120"/>
+              </a:rPr>
+              <a:t> de clusters </a:t>
+            </a:r>
+            <a:r>
+              <a:rPr lang="en-US" sz="1050" dirty="0" err="1">
+                <a:solidFill>
+                  <a:srgbClr val="1A1A2E"/>
+                </a:solidFill>
+                <a:latin typeface="Calibri" pitchFamily="34" charset="0"/>
+                <a:ea typeface="Calibri" pitchFamily="34" charset="-122"/>
+                <a:cs typeface="Calibri" pitchFamily="34" charset="-120"/>
+              </a:rPr>
+              <a:t>óptimo</a:t>
+            </a:r>
+            <a:r>
+              <a:rPr lang="en-US" sz="1050" dirty="0">
+                <a:solidFill>
+                  <a:srgbClr val="1A1A2E"/>
+                </a:solidFill>
+                <a:latin typeface="Calibri" pitchFamily="34" charset="0"/>
+                <a:ea typeface="Calibri" pitchFamily="34" charset="-122"/>
+                <a:cs typeface="Calibri" pitchFamily="34" charset="-120"/>
+              </a:rPr>
+              <a:t> es </a:t>
             </a:r>
             <a:r>
               <a:rPr lang="en-US" sz="1050" b="1" dirty="0">
@@ -9482,7 +10608,18 @@
                 <a:ea typeface="Calibri" pitchFamily="34" charset="-122"/>
                 <a:cs typeface="Calibri" pitchFamily="34" charset="-120"/>
               </a:rPr>
-              <a:t>DBSCAN: </a:t>
+              <a:t>k=3, </a:t>
+            </a:r>
+            <a:r>
+              <a:rPr lang="en-US" sz="1050" dirty="0" err="1">
+                <a:solidFill>
+                  <a:srgbClr val="1A1A2E"/>
+                </a:solidFill>
+                <a:latin typeface="Calibri" pitchFamily="34" charset="0"/>
+                <a:ea typeface="Calibri" pitchFamily="34" charset="-122"/>
+                <a:cs typeface="Calibri" pitchFamily="34" charset="-120"/>
+              </a:rPr>
+              <a:t>número</a:t>
             </a:r>
             <a:r>
               <a:rPr lang="en-US" sz="1050" dirty="0">
@@ -9493,9 +10630,262 @@
                 <a:ea typeface="Calibri" pitchFamily="34" charset="-122"/>
                 <a:cs typeface="Calibri" pitchFamily="34" charset="-120"/>
               </a:rPr>
-              <a:t>Separa jugadores core (alta participación, regularidad) de jugadores periféricos. Refuerza la partición binaria.</a:t>
-            </a:r>
-            <a:endParaRPr lang="en-US" sz="1050" dirty="0"/>
+              <a:t> de clusters a </a:t>
+            </a:r>
+            <a:r>
+              <a:rPr lang="en-US" sz="1050" dirty="0" err="1">
+                <a:solidFill>
+                  <a:srgbClr val="1A1A2E"/>
+                </a:solidFill>
+                <a:latin typeface="Calibri" pitchFamily="34" charset="0"/>
+                <a:ea typeface="Calibri" pitchFamily="34" charset="-122"/>
+                <a:cs typeface="Calibri" pitchFamily="34" charset="-120"/>
+              </a:rPr>
+              <a:t>tener</a:t>
+            </a:r>
+            <a:r>
+              <a:rPr lang="en-US" sz="1050" dirty="0">
+                <a:solidFill>
+                  <a:srgbClr val="1A1A2E"/>
+                </a:solidFill>
+                <a:latin typeface="Calibri" pitchFamily="34" charset="0"/>
+                <a:ea typeface="Calibri" pitchFamily="34" charset="-122"/>
+                <a:cs typeface="Calibri" pitchFamily="34" charset="-120"/>
+              </a:rPr>
+              <a:t> </a:t>
+            </a:r>
+            <a:r>
+              <a:rPr lang="en-US" sz="1050" dirty="0" err="1">
+                <a:solidFill>
+                  <a:srgbClr val="1A1A2E"/>
+                </a:solidFill>
+                <a:latin typeface="Calibri" pitchFamily="34" charset="0"/>
+                <a:ea typeface="Calibri" pitchFamily="34" charset="-122"/>
+                <a:cs typeface="Calibri" pitchFamily="34" charset="-120"/>
+              </a:rPr>
+              <a:t>en</a:t>
+            </a:r>
+            <a:r>
+              <a:rPr lang="en-US" sz="1050" dirty="0">
+                <a:solidFill>
+                  <a:srgbClr val="1A1A2E"/>
+                </a:solidFill>
+                <a:latin typeface="Calibri" pitchFamily="34" charset="0"/>
+                <a:ea typeface="Calibri" pitchFamily="34" charset="-122"/>
+                <a:cs typeface="Calibri" pitchFamily="34" charset="-120"/>
+              </a:rPr>
+              <a:t> </a:t>
+            </a:r>
+            <a:r>
+              <a:rPr lang="en-US" sz="1050" dirty="0" err="1">
+                <a:solidFill>
+                  <a:srgbClr val="1A1A2E"/>
+                </a:solidFill>
+                <a:latin typeface="Calibri" pitchFamily="34" charset="0"/>
+                <a:ea typeface="Calibri" pitchFamily="34" charset="-122"/>
+                <a:cs typeface="Calibri" pitchFamily="34" charset="-120"/>
+              </a:rPr>
+              <a:t>cuenta</a:t>
+            </a:r>
+            <a:r>
+              <a:rPr lang="en-US" sz="1050" dirty="0">
+                <a:solidFill>
+                  <a:srgbClr val="1A1A2E"/>
+                </a:solidFill>
+                <a:latin typeface="Calibri" pitchFamily="34" charset="0"/>
+                <a:ea typeface="Calibri" pitchFamily="34" charset="-122"/>
+                <a:cs typeface="Calibri" pitchFamily="34" charset="-120"/>
+              </a:rPr>
+              <a:t> </a:t>
+            </a:r>
+            <a:r>
+              <a:rPr lang="en-US" sz="1050" dirty="0" err="1">
+                <a:solidFill>
+                  <a:srgbClr val="1A1A2E"/>
+                </a:solidFill>
+                <a:latin typeface="Calibri" pitchFamily="34" charset="0"/>
+                <a:ea typeface="Calibri" pitchFamily="34" charset="-122"/>
+                <a:cs typeface="Calibri" pitchFamily="34" charset="-120"/>
+              </a:rPr>
+              <a:t>en</a:t>
+            </a:r>
+            <a:r>
+              <a:rPr lang="en-US" sz="1050" dirty="0">
+                <a:solidFill>
+                  <a:srgbClr val="1A1A2E"/>
+                </a:solidFill>
+                <a:latin typeface="Calibri" pitchFamily="34" charset="0"/>
+                <a:ea typeface="Calibri" pitchFamily="34" charset="-122"/>
+                <a:cs typeface="Calibri" pitchFamily="34" charset="-120"/>
+              </a:rPr>
+              <a:t> </a:t>
+            </a:r>
+            <a:r>
+              <a:rPr lang="en-US" sz="1050" dirty="0" err="1">
+                <a:solidFill>
+                  <a:srgbClr val="1A1A2E"/>
+                </a:solidFill>
+                <a:latin typeface="Calibri" pitchFamily="34" charset="0"/>
+                <a:ea typeface="Calibri" pitchFamily="34" charset="-122"/>
+                <a:cs typeface="Calibri" pitchFamily="34" charset="-120"/>
+              </a:rPr>
+              <a:t>el</a:t>
+            </a:r>
+            <a:r>
+              <a:rPr lang="en-US" sz="1050" dirty="0">
+                <a:solidFill>
+                  <a:srgbClr val="1A1A2E"/>
+                </a:solidFill>
+                <a:latin typeface="Calibri" pitchFamily="34" charset="0"/>
+                <a:ea typeface="Calibri" pitchFamily="34" charset="-122"/>
+                <a:cs typeface="Calibri" pitchFamily="34" charset="-120"/>
+              </a:rPr>
+              <a:t> </a:t>
+            </a:r>
+            <a:r>
+              <a:rPr lang="en-US" sz="1050" dirty="0" err="1">
+                <a:solidFill>
+                  <a:srgbClr val="1A1A2E"/>
+                </a:solidFill>
+                <a:latin typeface="Calibri" pitchFamily="34" charset="0"/>
+                <a:ea typeface="Calibri" pitchFamily="34" charset="-122"/>
+                <a:cs typeface="Calibri" pitchFamily="34" charset="-120"/>
+              </a:rPr>
+              <a:t>siguiente</a:t>
+            </a:r>
+            <a:r>
+              <a:rPr lang="en-US" sz="1050" dirty="0">
+                <a:solidFill>
+                  <a:srgbClr val="1A1A2E"/>
+                </a:solidFill>
+                <a:latin typeface="Calibri" pitchFamily="34" charset="0"/>
+                <a:ea typeface="Calibri" pitchFamily="34" charset="-122"/>
+                <a:cs typeface="Calibri" pitchFamily="34" charset="-120"/>
+              </a:rPr>
+              <a:t> paso, para </a:t>
+            </a:r>
+            <a:r>
+              <a:rPr lang="en-US" sz="1050" dirty="0" err="1">
+                <a:solidFill>
+                  <a:srgbClr val="1A1A2E"/>
+                </a:solidFill>
+                <a:latin typeface="Calibri" pitchFamily="34" charset="0"/>
+                <a:ea typeface="Calibri" pitchFamily="34" charset="-122"/>
+                <a:cs typeface="Calibri" pitchFamily="34" charset="-120"/>
+              </a:rPr>
+              <a:t>entrenar</a:t>
+            </a:r>
+            <a:r>
+              <a:rPr lang="en-US" sz="1050" dirty="0">
+                <a:solidFill>
+                  <a:srgbClr val="1A1A2E"/>
+                </a:solidFill>
+                <a:latin typeface="Calibri" pitchFamily="34" charset="0"/>
+                <a:ea typeface="Calibri" pitchFamily="34" charset="-122"/>
+                <a:cs typeface="Calibri" pitchFamily="34" charset="-120"/>
+              </a:rPr>
+              <a:t> </a:t>
+            </a:r>
+            <a:r>
+              <a:rPr lang="en-US" sz="1050" b="1" dirty="0">
+                <a:solidFill>
+                  <a:srgbClr val="1A1A2E"/>
+                </a:solidFill>
+                <a:latin typeface="Calibri" pitchFamily="34" charset="0"/>
+                <a:ea typeface="Calibri" pitchFamily="34" charset="-122"/>
+                <a:cs typeface="Calibri" pitchFamily="34" charset="-120"/>
+              </a:rPr>
+              <a:t>k-Means </a:t>
+            </a:r>
+            <a:r>
+              <a:rPr lang="en-US" sz="1050" dirty="0">
+                <a:solidFill>
+                  <a:srgbClr val="1A1A2E"/>
+                </a:solidFill>
+                <a:latin typeface="Calibri" pitchFamily="34" charset="0"/>
+                <a:ea typeface="Calibri" pitchFamily="34" charset="-122"/>
+                <a:cs typeface="Calibri" pitchFamily="34" charset="-120"/>
+              </a:rPr>
+              <a:t>y luego </a:t>
+            </a:r>
+            <a:r>
+              <a:rPr lang="en-US" sz="1050" dirty="0" err="1">
+                <a:solidFill>
+                  <a:srgbClr val="1A1A2E"/>
+                </a:solidFill>
+                <a:latin typeface="Calibri" pitchFamily="34" charset="0"/>
+                <a:ea typeface="Calibri" pitchFamily="34" charset="-122"/>
+                <a:cs typeface="Calibri" pitchFamily="34" charset="-120"/>
+              </a:rPr>
+              <a:t>graficar</a:t>
+            </a:r>
+            <a:r>
+              <a:rPr lang="en-US" sz="1050" dirty="0">
+                <a:solidFill>
+                  <a:srgbClr val="1A1A2E"/>
+                </a:solidFill>
+                <a:latin typeface="Calibri" pitchFamily="34" charset="0"/>
+                <a:ea typeface="Calibri" pitchFamily="34" charset="-122"/>
+                <a:cs typeface="Calibri" pitchFamily="34" charset="-120"/>
+              </a:rPr>
+              <a:t> </a:t>
+            </a:r>
+            <a:r>
+              <a:rPr lang="en-US" sz="1050" dirty="0" err="1">
+                <a:solidFill>
+                  <a:srgbClr val="1A1A2E"/>
+                </a:solidFill>
+                <a:latin typeface="Calibri" pitchFamily="34" charset="0"/>
+                <a:ea typeface="Calibri" pitchFamily="34" charset="-122"/>
+                <a:cs typeface="Calibri" pitchFamily="34" charset="-120"/>
+              </a:rPr>
+              <a:t>en</a:t>
+            </a:r>
+            <a:r>
+              <a:rPr lang="en-US" sz="1050" dirty="0">
+                <a:solidFill>
+                  <a:srgbClr val="1A1A2E"/>
+                </a:solidFill>
+                <a:latin typeface="Calibri" pitchFamily="34" charset="0"/>
+                <a:ea typeface="Calibri" pitchFamily="34" charset="-122"/>
+                <a:cs typeface="Calibri" pitchFamily="34" charset="-120"/>
+              </a:rPr>
+              <a:t> 3D con la </a:t>
+            </a:r>
+            <a:r>
+              <a:rPr lang="en-US" sz="1050" dirty="0" err="1">
+                <a:solidFill>
+                  <a:srgbClr val="1A1A2E"/>
+                </a:solidFill>
+                <a:latin typeface="Calibri" pitchFamily="34" charset="0"/>
+                <a:ea typeface="Calibri" pitchFamily="34" charset="-122"/>
+                <a:cs typeface="Calibri" pitchFamily="34" charset="-120"/>
+              </a:rPr>
+              <a:t>librería</a:t>
+            </a:r>
+            <a:r>
+              <a:rPr lang="en-US" sz="1050" dirty="0">
+                <a:solidFill>
+                  <a:srgbClr val="1A1A2E"/>
+                </a:solidFill>
+                <a:latin typeface="Calibri" pitchFamily="34" charset="0"/>
+                <a:ea typeface="Calibri" pitchFamily="34" charset="-122"/>
+                <a:cs typeface="Calibri" pitchFamily="34" charset="-120"/>
+              </a:rPr>
+              <a:t> </a:t>
+            </a:r>
+            <a:r>
+              <a:rPr lang="en-US" sz="1050" b="1" dirty="0">
+                <a:solidFill>
+                  <a:srgbClr val="1A1A2E"/>
+                </a:solidFill>
+                <a:latin typeface="Calibri" pitchFamily="34" charset="0"/>
+                <a:ea typeface="Calibri" pitchFamily="34" charset="-122"/>
+                <a:cs typeface="Calibri" pitchFamily="34" charset="-120"/>
+              </a:rPr>
+              <a:t>matplotlib.</a:t>
+            </a:r>
+            <a:endParaRPr lang="en-US" sz="1050" b="1" dirty="0"/>
           </a:p>
         </p:txBody>
       </p:sp>
@@ -9560,6 +10950,81 @@
               <a:t>Taller 2  ·  Aprendizaje No Supervisado</a:t>
             </a:r>
             <a:endParaRPr lang="en-US" sz="1000" dirty="0"/>
+          </a:p>
+        </p:txBody>
+      </p:sp>
+      <p:pic>
+        <p:nvPicPr>
+          <p:cNvPr id="16" name="Imagen 15" descr="Gráfico, Gráfico de líneas&#10;&#10;El contenido generado por IA puede ser incorrecto.">
+            <a:extLst>
+              <a:ext uri="{FF2B5EF4-FFF2-40B4-BE49-F238E27FC236}">
+                <a16:creationId xmlns:a16="http://schemas.microsoft.com/office/drawing/2014/main" id="{69E4D0BC-194B-FCF7-C11A-A279DDB85FBB}"/>
+              </a:ext>
+            </a:extLst>
+          </p:cNvPr>
+          <p:cNvPicPr>
+            <a:picLocks noChangeAspect="1"/>
+          </p:cNvPicPr>
+          <p:nvPr/>
+        </p:nvPicPr>
+        <p:blipFill>
+          <a:blip r:embed="rId3"/>
+          <a:srcRect l="776" r="1289" b="894"/>
+          <a:stretch/>
+        </p:blipFill>
+        <p:spPr>
+          <a:xfrm>
+            <a:off x="4452425" y="1138816"/>
+            <a:ext cx="4417255" cy="3079382"/>
+          </a:xfrm>
+          <a:prstGeom prst="rect">
+            <a:avLst/>
+          </a:prstGeom>
+        </p:spPr>
+      </p:pic>
+      <p:sp>
+        <p:nvSpPr>
+          <p:cNvPr id="17" name="Text 2">
+            <a:extLst>
+              <a:ext uri="{FF2B5EF4-FFF2-40B4-BE49-F238E27FC236}">
+                <a16:creationId xmlns:a16="http://schemas.microsoft.com/office/drawing/2014/main" id="{E62B01E3-42A5-FC0B-4763-DCB25A92A5AB}"/>
+              </a:ext>
+            </a:extLst>
+          </p:cNvPr>
+          <p:cNvSpPr/>
+          <p:nvPr/>
+        </p:nvSpPr>
+        <p:spPr>
+          <a:xfrm>
+            <a:off x="4452425" y="788493"/>
+            <a:ext cx="4417254" cy="274320"/>
+          </a:xfrm>
+          <a:prstGeom prst="rect">
+            <a:avLst/>
+          </a:prstGeom>
+          <a:noFill/>
+          <a:ln/>
+        </p:spPr>
+        <p:txBody>
+          <a:bodyPr wrap="square" rtlCol="0" anchor="ctr"/>
+          <a:lstStyle/>
+          <a:p>
+            <a:pPr marL="0" indent="0" algn="ctr">
+              <a:buNone/>
+            </a:pPr>
+            <a:r>
+              <a:rPr lang="en-US" sz="1200" b="1" i="1" dirty="0">
+                <a:latin typeface="Tahoma" panose="020B0604030504040204" pitchFamily="34" charset="0"/>
+                <a:ea typeface="Tahoma" panose="020B0604030504040204" pitchFamily="34" charset="0"/>
+                <a:cs typeface="Tahoma" panose="020B0604030504040204" pitchFamily="34" charset="0"/>
+              </a:rPr>
+              <a:t>Método del Codo — Python (sklearn)</a:t>
+            </a:r>
+            <a:endParaRPr lang="en-US" sz="1200" b="1" dirty="0">
+              <a:latin typeface="Tahoma" panose="020B0604030504040204" pitchFamily="34" charset="0"/>
+              <a:ea typeface="Tahoma" panose="020B0604030504040204" pitchFamily="34" charset="0"/>
+              <a:cs typeface="Tahoma" panose="020B0604030504040204" pitchFamily="34" charset="0"/>
+            </a:endParaRPr>
           </a:p>
         </p:txBody>
       </p:sp>
@@ -9654,7 +11119,29 @@
                 <a:ea typeface="Cambria" pitchFamily="34" charset="-122"/>
                 <a:cs typeface="Cambria" pitchFamily="34" charset="-120"/>
               </a:rPr>
-              <a:t>08  Visualización 3D — K-Means (Python)</a:t>
+              <a:t>08  Visualización 3D </a:t>
+            </a:r>
+            <a:r>
+              <a:rPr lang="en-US" sz="2400" b="1" dirty="0">
+                <a:solidFill>
+                  <a:schemeClr val="bg1"/>
+                </a:solidFill>
+                <a:latin typeface="Cambria" panose="02040503050406030204" pitchFamily="18" charset="0"/>
+                <a:ea typeface="Cambria" panose="02040503050406030204" pitchFamily="18" charset="0"/>
+                <a:cs typeface="Calibri" pitchFamily="34" charset="-120"/>
+              </a:rPr>
+              <a:t>→</a:t>
+            </a:r>
+            <a:r>
+              <a:rPr lang="en-US" sz="2200" b="1" dirty="0">
+                <a:solidFill>
+                  <a:srgbClr val="FFFFFF"/>
+                </a:solidFill>
+                <a:latin typeface="Cambria" pitchFamily="34" charset="0"/>
+                <a:ea typeface="Cambria" pitchFamily="34" charset="-122"/>
+                <a:cs typeface="Cambria" pitchFamily="34" charset="-120"/>
+              </a:rPr>
+              <a:t> K-Means (Python)</a:t>
             </a:r>
             <a:endParaRPr lang="en-US" sz="2200" dirty="0"/>
           </a:p>
@@ -9686,14 +11173,11 @@
             </a:pPr>
             <a:r>
               <a:rPr lang="en-US" sz="1000" b="1" i="1" dirty="0">
-                <a:solidFill>
-                  <a:srgbClr val="6C757D"/>
-                </a:solidFill>
-                <a:latin typeface="Calibri" pitchFamily="34" charset="0"/>
-                <a:ea typeface="Calibri" pitchFamily="34" charset="-122"/>
-                <a:cs typeface="Calibri" pitchFamily="34" charset="-120"/>
-              </a:rPr>
-              <a:t>Variables: Partidos Jugados · Goles · Asistencias  |  k=3 (Python)</a:t>
+                <a:latin typeface="Calibri" pitchFamily="34" charset="0"/>
+                <a:ea typeface="Calibri" pitchFamily="34" charset="-122"/>
+                <a:cs typeface="Calibri" pitchFamily="34" charset="-120"/>
+              </a:rPr>
+              <a:t>Variables: Partidos Jugados · Goles · Asistencias  |  k=3</a:t>
             </a:r>
             <a:endParaRPr lang="en-US" sz="1000" b="1" dirty="0"/>
           </a:p>
@@ -9789,7 +11273,28 @@
                 <a:ea typeface="Cambria" pitchFamily="34" charset="-122"/>
                 <a:cs typeface="Cambria" pitchFamily="34" charset="-120"/>
               </a:rPr>
-              <a:t>Verde — Baja participación</a:t>
+              <a:t>Verde </a:t>
+            </a:r>
+            <a:r>
+              <a:rPr lang="en-US" sz="1100" b="1" dirty="0">
+                <a:solidFill>
+                  <a:srgbClr val="9B1C1C"/>
+                </a:solidFill>
+                <a:latin typeface="Cambria" pitchFamily="34" charset="0"/>
+                <a:ea typeface="Cambria" pitchFamily="34" charset="-122"/>
+              </a:rPr>
+              <a:t>→</a:t>
+            </a:r>
+            <a:r>
+              <a:rPr lang="en-US" sz="1100" b="1" dirty="0">
+                <a:solidFill>
+                  <a:srgbClr val="9B1C1C"/>
+                </a:solidFill>
+                <a:latin typeface="Cambria" pitchFamily="34" charset="0"/>
+                <a:ea typeface="Cambria" pitchFamily="34" charset="-122"/>
+                <a:cs typeface="Cambria" pitchFamily="34" charset="-120"/>
+              </a:rPr>
+              <a:t> Baja participación</a:t>
             </a:r>
             <a:endParaRPr lang="en-US" sz="1100" dirty="0"/>
           </a:p>
@@ -9820,7 +11325,7 @@
               <a:buNone/>
             </a:pPr>
             <a:r>
-              <a:rPr lang="en-US" sz="1000" dirty="0">
+              <a:rPr lang="en-US" sz="1000" b="1" dirty="0">
                 <a:solidFill>
                   <a:srgbClr val="1A1A2E"/>
                 </a:solidFill>
@@ -9830,7 +11335,7 @@
               </a:rPr>
               <a:t>Pocos partidos, mínimos goles y asistencias.</a:t>
             </a:r>
-            <a:endParaRPr lang="en-US" sz="1000" dirty="0"/>
+            <a:endParaRPr lang="en-US" sz="1000" b="1" dirty="0"/>
           </a:p>
         </p:txBody>
       </p:sp>
@@ -9924,7 +11429,7 @@
                 <a:ea typeface="Cambria" pitchFamily="34" charset="-122"/>
                 <a:cs typeface="Cambria" pitchFamily="34" charset="-120"/>
               </a:rPr>
-              <a:t>Amarillo — Participación media</a:t>
+              <a:t>Amarillo → Participación media</a:t>
             </a:r>
             <a:endParaRPr lang="en-US" sz="1100" dirty="0"/>
           </a:p>
@@ -9955,7 +11460,7 @@
               <a:buNone/>
             </a:pPr>
             <a:r>
-              <a:rPr lang="en-US" sz="1000" dirty="0">
+              <a:rPr lang="en-US" sz="1000" b="1" dirty="0">
                 <a:solidFill>
                   <a:srgbClr val="1A1A2E"/>
                 </a:solidFill>
@@ -9965,7 +11470,7 @@
               </a:rPr>
               <a:t>Titulares regulares con contribución moderada.</a:t>
             </a:r>
-            <a:endParaRPr lang="en-US" sz="1000" dirty="0"/>
+            <a:endParaRPr lang="en-US" sz="1000" b="1" dirty="0"/>
           </a:p>
         </p:txBody>
       </p:sp>
@@ -10051,7 +11556,7 @@
               <a:buNone/>
             </a:pPr>
             <a:r>
-              <a:rPr lang="en-US" sz="1100" b="1" dirty="0">
+              <a:rPr lang="en-US" sz="1100" b="1" dirty="0" err="1">
                 <a:solidFill>
                   <a:srgbClr val="9B1C1C"/>
                 </a:solidFill>
@@ -10059,7 +11564,18 @@
                 <a:ea typeface="Cambria" pitchFamily="34" charset="-122"/>
                 <a:cs typeface="Cambria" pitchFamily="34" charset="-120"/>
               </a:rPr>
-              <a:t>Morado — Alto impacto</a:t>
+              <a:t>Morado</a:t>
+            </a:r>
+            <a:r>
+              <a:rPr lang="en-US" sz="1100" b="1" dirty="0">
+                <a:solidFill>
+                  <a:srgbClr val="9B1C1C"/>
+                </a:solidFill>
+                <a:latin typeface="Cambria" pitchFamily="34" charset="0"/>
+                <a:ea typeface="Cambria" pitchFamily="34" charset="-122"/>
+                <a:cs typeface="Cambria" pitchFamily="34" charset="-120"/>
+              </a:rPr>
+              <a:t> → Alto impacto</a:t>
             </a:r>
             <a:endParaRPr lang="en-US" sz="1100" dirty="0"/>
           </a:p>
@@ -10090,7 +11606,7 @@
               <a:buNone/>
             </a:pPr>
             <a:r>
-              <a:rPr lang="en-US" sz="1000" dirty="0">
+              <a:rPr lang="en-US" sz="1000" b="1" dirty="0">
                 <a:solidFill>
                   <a:srgbClr val="1A1A2E"/>
                 </a:solidFill>
@@ -10100,7 +11616,7 @@
               </a:rPr>
               <a:t>Máxima participación, líderes en goles y asistencias.</a:t>
             </a:r>
-            <a:endParaRPr lang="en-US" sz="1000" dirty="0"/>
+            <a:endParaRPr lang="en-US" sz="1000" b="1" dirty="0"/>
           </a:p>
         </p:txBody>
       </p:sp>
@@ -10173,7 +11689,18 @@
                 <a:ea typeface="Consolas" pitchFamily="34" charset="-122"/>
                 <a:cs typeface="Consolas" pitchFamily="34" charset="-120"/>
               </a:rPr>
-              <a:t>KMeans</a:t>
+              <a:t>Kmeans</a:t>
+            </a:r>
+            <a:r>
+              <a:rPr lang="en-US" sz="950" b="1" dirty="0">
+                <a:solidFill>
+                  <a:srgbClr val="D4AC0D"/>
+                </a:solidFill>
+                <a:latin typeface="Consolas" pitchFamily="34" charset="0"/>
+                <a:ea typeface="Consolas" pitchFamily="34" charset="-122"/>
+                <a:cs typeface="Consolas" pitchFamily="34" charset="-120"/>
+              </a:rPr>
+              <a:t> · matplotlib · pandas</a:t>
             </a:r>
             <a:endParaRPr lang="en-US" sz="950" b="1" dirty="0"/>
           </a:p>
@@ -10245,10 +11772,10 @@
       </p:sp>
       <p:pic>
         <p:nvPicPr>
-          <p:cNvPr id="23" name="Imagen 22">
+          <p:cNvPr id="25" name="Imagen 24">
             <a:extLst>
               <a:ext uri="{FF2B5EF4-FFF2-40B4-BE49-F238E27FC236}">
-                <a16:creationId xmlns:a16="http://schemas.microsoft.com/office/drawing/2014/main" id="{9B20C3EA-7910-8ED0-855A-183263904F0F}"/>
+                <a16:creationId xmlns:a16="http://schemas.microsoft.com/office/drawing/2014/main" id="{4790A97A-4166-37E5-4605-A1FF097847B7}"/>
               </a:ext>
             </a:extLst>
           </p:cNvPr>
@@ -10265,8 +11792,8 @@
         </p:blipFill>
         <p:spPr>
           <a:xfrm>
-            <a:off x="1339947" y="932156"/>
-            <a:ext cx="3446585" cy="3530648"/>
+            <a:off x="1104509" y="777240"/>
+            <a:ext cx="3917461" cy="3831600"/>
           </a:xfrm>
           <a:prstGeom prst="rect">
             <a:avLst/>

--- a/Presentacion Clustering Futbol Europeo.pptx
+++ b/Presentacion Clustering Futbol Europeo.pptx
@@ -2013,6 +2013,18 @@
   <p:clrMapOvr>
     <a:masterClrMapping/>
   </p:clrMapOvr>
+  <mc:AlternateContent xmlns:mc="http://schemas.openxmlformats.org/markup-compatibility/2006">
+    <mc:Choice xmlns:p14="http://schemas.microsoft.com/office/powerpoint/2010/main" Requires="p14">
+      <p:transition p14:dur="100">
+        <p:cut/>
+      </p:transition>
+    </mc:Choice>
+    <mc:Fallback>
+      <p:transition>
+        <p:cut/>
+      </p:transition>
+    </mc:Fallback>
+  </mc:AlternateContent>
 </p:sld>
 </file>
 
@@ -2656,6 +2668,9 @@
   <p:clrMapOvr>
     <a:masterClrMapping/>
   </p:clrMapOvr>
+  <p:transition spd="slow">
+    <p:push dir="u"/>
+  </p:transition>
 </p:sld>
 </file>
 
@@ -3161,6 +3176,9 @@
   <p:clrMapOvr>
     <a:masterClrMapping/>
   </p:clrMapOvr>
+  <p:transition spd="slow">
+    <p:push dir="u"/>
+  </p:transition>
 </p:sld>
 </file>
 
@@ -4299,6 +4317,9 @@
   <p:clrMapOvr>
     <a:masterClrMapping/>
   </p:clrMapOvr>
+  <p:transition spd="slow">
+    <p:push dir="u"/>
+  </p:transition>
 </p:sld>
 </file>
 
@@ -5289,6 +5310,9 @@
   <p:clrMapOvr>
     <a:masterClrMapping/>
   </p:clrMapOvr>
+  <p:transition spd="med">
+    <p:pull/>
+  </p:transition>
 </p:sld>
 </file>
 
@@ -6419,6 +6443,9 @@
   <p:clrMapOvr>
     <a:masterClrMapping/>
   </p:clrMapOvr>
+  <p:transition spd="slow">
+    <p:push dir="u"/>
+  </p:transition>
 </p:sld>
 </file>
 
@@ -7780,6 +7807,9 @@
   <p:clrMapOvr>
     <a:masterClrMapping/>
   </p:clrMapOvr>
+  <p:transition spd="slow">
+    <p:push dir="u"/>
+  </p:transition>
 </p:sld>
 </file>
 
@@ -8508,6 +8538,9 @@
   <p:clrMapOvr>
     <a:masterClrMapping/>
   </p:clrMapOvr>
+  <p:transition spd="slow">
+    <p:push dir="u"/>
+  </p:transition>
 </p:sld>
 </file>
 
@@ -9167,6 +9200,9 @@
   <p:clrMapOvr>
     <a:masterClrMapping/>
   </p:clrMapOvr>
+  <p:transition spd="med">
+    <p:pull/>
+  </p:transition>
 </p:sld>
 </file>
 
@@ -9960,6 +9996,9 @@
   <p:clrMapOvr>
     <a:masterClrMapping/>
   </p:clrMapOvr>
+  <p:transition spd="med">
+    <p:pull/>
+  </p:transition>
 </p:sld>
 </file>
 
@@ -11033,6 +11072,9 @@
   <p:clrMapOvr>
     <a:masterClrMapping/>
   </p:clrMapOvr>
+  <p:transition spd="med">
+    <p:pull/>
+  </p:transition>
 </p:sld>
 </file>
 
@@ -11805,6 +11847,9 @@
   <p:clrMapOvr>
     <a:masterClrMapping/>
   </p:clrMapOvr>
+  <p:transition spd="med">
+    <p:pull/>
+  </p:transition>
 </p:sld>
 </file>
 
